--- a/reference/governance/sdlc/assets/evolith-sdlc-value-proposition.pptx
+++ b/reference/governance/sdlc/assets/evolith-sdlc-value-proposition.pptx
@@ -8,17 +8,8 @@
     <p:sldId id="256" r:id="rId7"/>
     <p:sldId id="257" r:id="rId8"/>
     <p:sldId id="258" r:id="rId9"/>
-    <p:sldId id="259" r:id="rId10"/>
-    <p:sldId id="260" r:id="rId11"/>
-    <p:sldId id="261" r:id="rId12"/>
-    <p:sldId id="262" r:id="rId13"/>
-    <p:sldId id="263" r:id="rId14"/>
-    <p:sldId id="264" r:id="rId15"/>
-    <p:sldId id="265" r:id="rId16"/>
-    <p:sldId id="266" r:id="rId17"/>
-    <p:sldId id="267" r:id="rId18"/>
   </p:sldIdLst>
-  <p:sldSz cx="12191695" cy="6858000" type="screen4x3"/>
+  <p:sldSz cx="9144000" cy="6858000" type="screen4x3"/>
   <p:notesSz cx="6858000" cy="9144000"/>
   <p:defaultTextStyle>
     <a:defPPr>
@@ -3092,6 +3083,14 @@
 <file path=ppt/slides/slide1.xml><?xml version="1.0" encoding="utf-8"?>
 <p:sld xmlns:a="http://schemas.openxmlformats.org/drawingml/2006/main" xmlns:p="http://schemas.openxmlformats.org/presentationml/2006/main" xmlns:r="http://schemas.openxmlformats.org/officeDocument/2006/relationships">
   <p:cSld>
+    <p:bg>
+      <p:bgPr>
+        <a:solidFill>
+          <a:srgbClr val="121212"/>
+        </a:solidFill>
+        <a:effectLst/>
+      </p:bgPr>
+    </p:bg>
     <p:spTree>
       <p:nvGrpSpPr>
         <p:cNvPr id="1" name=""/>
@@ -3101,92 +3100,51 @@
       <p:grpSpPr/>
       <p:sp>
         <p:nvSpPr>
-          <p:cNvPr id="2" name="Rectangle 1"/>
-          <p:cNvSpPr/>
-          <p:nvPr/>
+          <p:cNvPr id="2" name="Title 1"/>
+          <p:cNvSpPr>
+            <a:spLocks noGrp="1"/>
+          </p:cNvSpPr>
+          <p:nvPr>
+            <p:ph type="ctrTitle"/>
+          </p:nvPr>
         </p:nvSpPr>
         <p:spPr>
           <a:xfrm>
-            <a:off x="0" y="0"/>
-            <a:ext cx="12191695" cy="6858000"/>
+            <a:off x="457200" y="457200"/>
+            <a:ext cx="8229600" cy="914400"/>
           </a:xfrm>
-          <a:prstGeom prst="rect">
-            <a:avLst/>
-          </a:prstGeom>
-          <a:solidFill>
-            <a:srgbClr val="1E3A5F"/>
-          </a:solidFill>
-          <a:ln>
-            <a:solidFill>
-              <a:srgbClr val="1E3A5F"/>
-            </a:solidFill>
-          </a:ln>
         </p:spPr>
-        <p:style>
-          <a:lnRef idx="1">
-            <a:schemeClr val="accent1"/>
-          </a:lnRef>
-          <a:fillRef idx="3">
-            <a:schemeClr val="accent1"/>
-          </a:fillRef>
-          <a:effectRef idx="2">
-            <a:schemeClr val="accent1"/>
-          </a:effectRef>
-          <a:fontRef idx="minor">
-            <a:schemeClr val="lt1"/>
-          </a:fontRef>
-        </p:style>
-        <p:txBody>
-          <a:bodyPr rtlCol="0" anchor="ctr"/>
-          <a:lstStyle/>
-          <a:p>
-            <a:pPr algn="ctr"/>
-          </a:p>
-        </p:txBody>
-      </p:sp>
-      <p:sp>
-        <p:nvSpPr>
-          <p:cNvPr id="3" name="Rectangle 2"/>
-          <p:cNvSpPr/>
-          <p:nvPr/>
-        </p:nvSpPr>
-        <p:spPr>
-          <a:xfrm>
-            <a:off x="0" y="6400800"/>
-            <a:ext cx="12191695" cy="457200"/>
-          </a:xfrm>
-          <a:prstGeom prst="rect">
-            <a:avLst/>
-          </a:prstGeom>
-          <a:solidFill>
-            <a:srgbClr val="3B82F6"/>
-          </a:solidFill>
-          <a:ln>
-            <a:solidFill>
-              <a:srgbClr val="3B82F6"/>
-            </a:solidFill>
-          </a:ln>
-        </p:spPr>
-        <p:style>
-          <a:lnRef idx="1">
-            <a:schemeClr val="accent1"/>
-          </a:lnRef>
-          <a:fillRef idx="3">
-            <a:schemeClr val="accent1"/>
-          </a:fillRef>
-          <a:effectRef idx="2">
-            <a:schemeClr val="accent1"/>
-          </a:effectRef>
-          <a:fontRef idx="minor">
-            <a:schemeClr val="lt1"/>
-          </a:fontRef>
-        </p:style>
-        <p:txBody>
-          <a:bodyPr rtlCol="0" anchor="ctr"/>
-          <a:lstStyle/>
-          <a:p>
-            <a:pPr algn="ctr"/>
-          </a:p>
+        <p:txBody>
+          <a:bodyPr/>
+          <a:lstStyle/>
+          <a:p>
+            <a:pPr algn="l"/>
+            <a:r>
+              <a:rPr sz="3600" b="1">
+                <a:solidFill>
+                  <a:srgbClr val="CAC5B2"/>
+                </a:solidFill>
+              </a:rPr>
+              <a:t>Evolith: Gobernanza Inteligente del SDLC</a:t>
+            </a:r>
+          </a:p>
+        </p:txBody>
+      </p:sp>
+      <p:sp>
+        <p:nvSpPr>
+          <p:cNvPr id="3" name="Subtitle 2"/>
+          <p:cNvSpPr>
+            <a:spLocks noGrp="1"/>
+          </p:cNvSpPr>
+          <p:nvPr>
+            <p:ph type="subTitle" idx="1"/>
+          </p:nvPr>
+        </p:nvSpPr>
+        <p:spPr/>
+        <p:txBody>
+          <a:bodyPr/>
+          <a:lstStyle/>
+          <a:p/>
         </p:txBody>
       </p:sp>
       <p:sp>
@@ -3197,8 +3155,8 @@
         </p:nvSpPr>
         <p:spPr>
           <a:xfrm>
-            <a:off x="914400" y="2286000"/>
-            <a:ext cx="10362895" cy="1828800"/>
+            <a:off x="457200" y="1828800"/>
+            <a:ext cx="8229600" cy="1371600"/>
           </a:xfrm>
           <a:prstGeom prst="rect">
             <a:avLst/>
@@ -3206,77 +3164,45 @@
           <a:noFill/>
         </p:spPr>
         <p:txBody>
-          <a:bodyPr wrap="square">
+          <a:bodyPr wrap="none">
             <a:spAutoFit/>
           </a:bodyPr>
           <a:lstStyle/>
+          <a:p/>
           <a:p>
             <a:pPr>
-              <a:defRPr b="1" sz="5000">
+              <a:defRPr sz="2400">
                 <a:solidFill>
                   <a:srgbClr val="FFFFFF"/>
                 </a:solidFill>
               </a:defRPr>
             </a:pPr>
             <a:r>
-              <a:t>Evolith: Gobierno Arquitectónico y Excelencia SDLC</a:t>
-            </a:r>
-          </a:p>
-          <a:p>
-            <a:pPr>
-              <a:spcBef>
-                <a:spcPts val="1400"/>
-              </a:spcBef>
-              <a:defRPr sz="2400">
-                <a:solidFill>
-                  <a:srgbClr val="3B82F6"/>
-                </a:solidFill>
-              </a:defRPr>
-            </a:pPr>
-            <a:r>
-              <a:t>Transformando código en valor de negocio medible, seguro y predecible.</a:t>
-            </a:r>
-          </a:p>
-        </p:txBody>
-      </p:sp>
-    </p:spTree>
-  </p:cSld>
-  <p:clrMapOvr>
-    <a:masterClrMapping/>
-  </p:clrMapOvr>
-</p:sld>
-</file>
-
-<file path=ppt/slides/slide10.xml><?xml version="1.0" encoding="utf-8"?>
-<p:sld xmlns:a="http://schemas.openxmlformats.org/drawingml/2006/main" xmlns:p="http://schemas.openxmlformats.org/presentationml/2006/main" xmlns:r="http://schemas.openxmlformats.org/officeDocument/2006/relationships">
-  <p:cSld>
-    <p:spTree>
-      <p:nvGrpSpPr>
-        <p:cNvPr id="1" name=""/>
-        <p:cNvGrpSpPr/>
-        <p:nvPr/>
-      </p:nvGrpSpPr>
-      <p:grpSpPr/>
-      <p:sp>
-        <p:nvSpPr>
-          <p:cNvPr id="2" name="Rectangle 1"/>
+              <a:t>Transforme la entrega de tecnología en valor de negocio.</a:t>
+            </a:r>
+          </a:p>
+        </p:txBody>
+      </p:sp>
+      <p:sp>
+        <p:nvSpPr>
+          <p:cNvPr id="5" name="Rounded Rectangle 4"/>
           <p:cNvSpPr/>
           <p:nvPr/>
         </p:nvSpPr>
         <p:spPr>
           <a:xfrm>
-            <a:off x="0" y="0"/>
-            <a:ext cx="12191695" cy="1097280"/>
+            <a:off x="3657600" y="3657600"/>
+            <a:ext cx="1828800" cy="1828800"/>
           </a:xfrm>
-          <a:prstGeom prst="rect">
+          <a:prstGeom prst="roundRect">
             <a:avLst/>
           </a:prstGeom>
           <a:solidFill>
-            <a:srgbClr val="1E3A5F"/>
+            <a:srgbClr val="121212"/>
           </a:solidFill>
-          <a:ln>
+          <a:ln w="25400">
             <a:solidFill>
-              <a:srgbClr val="1E3A5F"/>
+              <a:srgbClr val="CAC5B2"/>
             </a:solidFill>
           </a:ln>
         </p:spPr>
@@ -3299,566 +3225,24 @@
           <a:lstStyle/>
           <a:p>
             <a:pPr algn="ctr"/>
-          </a:p>
-        </p:txBody>
-      </p:sp>
-      <p:sp>
-        <p:nvSpPr>
-          <p:cNvPr id="3" name="Rectangle 2"/>
-          <p:cNvSpPr/>
-          <p:nvPr/>
-        </p:nvSpPr>
-        <p:spPr>
-          <a:xfrm>
-            <a:off x="0" y="1097280"/>
-            <a:ext cx="12191695" cy="91440"/>
-          </a:xfrm>
-          <a:prstGeom prst="rect">
-            <a:avLst/>
-          </a:prstGeom>
-          <a:solidFill>
-            <a:srgbClr val="3B82F6"/>
-          </a:solidFill>
-          <a:ln>
-            <a:solidFill>
-              <a:srgbClr val="3B82F6"/>
-            </a:solidFill>
-          </a:ln>
-        </p:spPr>
-        <p:style>
-          <a:lnRef idx="1">
-            <a:schemeClr val="accent1"/>
-          </a:lnRef>
-          <a:fillRef idx="3">
-            <a:schemeClr val="accent1"/>
-          </a:fillRef>
-          <a:effectRef idx="2">
-            <a:schemeClr val="accent1"/>
-          </a:effectRef>
-          <a:fontRef idx="minor">
-            <a:schemeClr val="lt1"/>
-          </a:fontRef>
-        </p:style>
-        <p:txBody>
-          <a:bodyPr rtlCol="0" anchor="ctr"/>
-          <a:lstStyle/>
+            <a:r>
+              <a:rPr sz="1400" b="1">
+                <a:solidFill>
+                  <a:srgbClr val="121212"/>
+                </a:solidFill>
+              </a:rPr>
+              <a:t>EVOLITH</a:t>
+            </a:r>
+          </a:p>
           <a:p>
             <a:pPr algn="ctr"/>
-          </a:p>
-        </p:txBody>
-      </p:sp>
-      <p:sp>
-        <p:nvSpPr>
-          <p:cNvPr id="4" name="TextBox 3"/>
-          <p:cNvSpPr txBox="1"/>
-          <p:nvPr/>
-        </p:nvSpPr>
-        <p:spPr>
-          <a:xfrm>
-            <a:off x="457200" y="91440"/>
-            <a:ext cx="11277295" cy="914400"/>
-          </a:xfrm>
-          <a:prstGeom prst="rect">
-            <a:avLst/>
-          </a:prstGeom>
-          <a:noFill/>
-        </p:spPr>
-        <p:txBody>
-          <a:bodyPr wrap="none">
-            <a:spAutoFit/>
-          </a:bodyPr>
-          <a:lstStyle/>
-          <a:p>
-            <a:pPr>
-              <a:defRPr b="1" sz="3600">
+            <a:r>
+              <a:rPr sz="1400" b="1">
                 <a:solidFill>
-                  <a:srgbClr val="FFFFFF"/>
+                  <a:srgbClr val="121212"/>
                 </a:solidFill>
-              </a:defRPr>
-            </a:pPr>
-            <a:r>
-              <a:t>El Cambio de Paradigma</a:t>
-            </a:r>
-          </a:p>
-        </p:txBody>
-      </p:sp>
-      <p:sp>
-        <p:nvSpPr>
-          <p:cNvPr id="5" name="TextBox 4"/>
-          <p:cNvSpPr txBox="1"/>
-          <p:nvPr/>
-        </p:nvSpPr>
-        <p:spPr>
-          <a:xfrm>
-            <a:off x="457200" y="1645920"/>
-            <a:ext cx="11277295" cy="5029200"/>
-          </a:xfrm>
-          <a:prstGeom prst="rect">
-            <a:avLst/>
-          </a:prstGeom>
-          <a:noFill/>
-        </p:spPr>
-        <p:txBody>
-          <a:bodyPr wrap="square">
-            <a:spAutoFit/>
-          </a:bodyPr>
-          <a:lstStyle/>
-          <a:p>
-            <a:pPr>
-              <a:defRPr sz="2200">
-                <a:solidFill>
-                  <a:srgbClr val="323232"/>
-                </a:solidFill>
-              </a:defRPr>
-            </a:pPr>
-            <a:r>
-              <a:t>De Pruebas al final a Quality Gates continuos.</a:t>
-            </a:r>
-          </a:p>
-          <a:p>
-            <a:pPr>
-              <a:spcBef>
-                <a:spcPts val="1400"/>
-              </a:spcBef>
-              <a:defRPr sz="2200">
-                <a:solidFill>
-                  <a:srgbClr val="323232"/>
-                </a:solidFill>
-              </a:defRPr>
-            </a:pPr>
-            <a:r>
-              <a:t>• De Arquitectura mental a Blueprint y ADRs.</a:t>
-            </a:r>
-          </a:p>
-          <a:p>
-            <a:pPr>
-              <a:spcBef>
-                <a:spcPts val="1400"/>
-              </a:spcBef>
-              <a:defRPr sz="2200">
-                <a:solidFill>
-                  <a:srgbClr val="323232"/>
-                </a:solidFill>
-              </a:defRPr>
-            </a:pPr>
-            <a:r>
-              <a:t>• De Despliegues estresantes a Runbooks automatizados.</a:t>
-            </a:r>
-          </a:p>
-        </p:txBody>
-      </p:sp>
-    </p:spTree>
-  </p:cSld>
-  <p:clrMapOvr>
-    <a:masterClrMapping/>
-  </p:clrMapOvr>
-</p:sld>
-</file>
-
-<file path=ppt/slides/slide11.xml><?xml version="1.0" encoding="utf-8"?>
-<p:sld xmlns:a="http://schemas.openxmlformats.org/drawingml/2006/main" xmlns:p="http://schemas.openxmlformats.org/presentationml/2006/main" xmlns:r="http://schemas.openxmlformats.org/officeDocument/2006/relationships">
-  <p:cSld>
-    <p:spTree>
-      <p:nvGrpSpPr>
-        <p:cNvPr id="1" name=""/>
-        <p:cNvGrpSpPr/>
-        <p:nvPr/>
-      </p:nvGrpSpPr>
-      <p:grpSpPr/>
-      <p:sp>
-        <p:nvSpPr>
-          <p:cNvPr id="2" name="Rectangle 1"/>
-          <p:cNvSpPr/>
-          <p:nvPr/>
-        </p:nvSpPr>
-        <p:spPr>
-          <a:xfrm>
-            <a:off x="0" y="0"/>
-            <a:ext cx="12191695" cy="1097280"/>
-          </a:xfrm>
-          <a:prstGeom prst="rect">
-            <a:avLst/>
-          </a:prstGeom>
-          <a:solidFill>
-            <a:srgbClr val="1E3A5F"/>
-          </a:solidFill>
-          <a:ln>
-            <a:solidFill>
-              <a:srgbClr val="1E3A5F"/>
-            </a:solidFill>
-          </a:ln>
-        </p:spPr>
-        <p:style>
-          <a:lnRef idx="1">
-            <a:schemeClr val="accent1"/>
-          </a:lnRef>
-          <a:fillRef idx="3">
-            <a:schemeClr val="accent1"/>
-          </a:fillRef>
-          <a:effectRef idx="2">
-            <a:schemeClr val="accent1"/>
-          </a:effectRef>
-          <a:fontRef idx="minor">
-            <a:schemeClr val="lt1"/>
-          </a:fontRef>
-        </p:style>
-        <p:txBody>
-          <a:bodyPr rtlCol="0" anchor="ctr"/>
-          <a:lstStyle/>
-          <a:p>
-            <a:pPr algn="ctr"/>
-          </a:p>
-        </p:txBody>
-      </p:sp>
-      <p:sp>
-        <p:nvSpPr>
-          <p:cNvPr id="3" name="Rectangle 2"/>
-          <p:cNvSpPr/>
-          <p:nvPr/>
-        </p:nvSpPr>
-        <p:spPr>
-          <a:xfrm>
-            <a:off x="0" y="1097280"/>
-            <a:ext cx="12191695" cy="91440"/>
-          </a:xfrm>
-          <a:prstGeom prst="rect">
-            <a:avLst/>
-          </a:prstGeom>
-          <a:solidFill>
-            <a:srgbClr val="3B82F6"/>
-          </a:solidFill>
-          <a:ln>
-            <a:solidFill>
-              <a:srgbClr val="3B82F6"/>
-            </a:solidFill>
-          </a:ln>
-        </p:spPr>
-        <p:style>
-          <a:lnRef idx="1">
-            <a:schemeClr val="accent1"/>
-          </a:lnRef>
-          <a:fillRef idx="3">
-            <a:schemeClr val="accent1"/>
-          </a:fillRef>
-          <a:effectRef idx="2">
-            <a:schemeClr val="accent1"/>
-          </a:effectRef>
-          <a:fontRef idx="minor">
-            <a:schemeClr val="lt1"/>
-          </a:fontRef>
-        </p:style>
-        <p:txBody>
-          <a:bodyPr rtlCol="0" anchor="ctr"/>
-          <a:lstStyle/>
-          <a:p>
-            <a:pPr algn="ctr"/>
-          </a:p>
-        </p:txBody>
-      </p:sp>
-      <p:sp>
-        <p:nvSpPr>
-          <p:cNvPr id="4" name="TextBox 3"/>
-          <p:cNvSpPr txBox="1"/>
-          <p:nvPr/>
-        </p:nvSpPr>
-        <p:spPr>
-          <a:xfrm>
-            <a:off x="457200" y="91440"/>
-            <a:ext cx="11277295" cy="914400"/>
-          </a:xfrm>
-          <a:prstGeom prst="rect">
-            <a:avLst/>
-          </a:prstGeom>
-          <a:noFill/>
-        </p:spPr>
-        <p:txBody>
-          <a:bodyPr wrap="none">
-            <a:spAutoFit/>
-          </a:bodyPr>
-          <a:lstStyle/>
-          <a:p>
-            <a:pPr>
-              <a:defRPr b="1" sz="3600">
-                <a:solidFill>
-                  <a:srgbClr val="FFFFFF"/>
-                </a:solidFill>
-              </a:defRPr>
-            </a:pPr>
-            <a:r>
-              <a:t>El Camino a la Excelencia</a:t>
-            </a:r>
-          </a:p>
-        </p:txBody>
-      </p:sp>
-      <p:sp>
-        <p:nvSpPr>
-          <p:cNvPr id="5" name="TextBox 4"/>
-          <p:cNvSpPr txBox="1"/>
-          <p:nvPr/>
-        </p:nvSpPr>
-        <p:spPr>
-          <a:xfrm>
-            <a:off x="457200" y="1645920"/>
-            <a:ext cx="11277295" cy="5029200"/>
-          </a:xfrm>
-          <a:prstGeom prst="rect">
-            <a:avLst/>
-          </a:prstGeom>
-          <a:noFill/>
-        </p:spPr>
-        <p:txBody>
-          <a:bodyPr wrap="square">
-            <a:spAutoFit/>
-          </a:bodyPr>
-          <a:lstStyle/>
-          <a:p>
-            <a:pPr>
-              <a:defRPr sz="2200">
-                <a:solidFill>
-                  <a:srgbClr val="323232"/>
-                </a:solidFill>
-              </a:defRPr>
-            </a:pPr>
-            <a:r>
-              <a:t>Taller de Assessment</a:t>
-            </a:r>
-          </a:p>
-          <a:p>
-            <a:pPr>
-              <a:spcBef>
-                <a:spcPts val="1400"/>
-              </a:spcBef>
-              <a:defRPr sz="2200">
-                <a:solidFill>
-                  <a:srgbClr val="323232"/>
-                </a:solidFill>
-              </a:defRPr>
-            </a:pPr>
-            <a:r>
-              <a:t>• Piloto de Fases 1 a 3</a:t>
-            </a:r>
-          </a:p>
-          <a:p>
-            <a:pPr>
-              <a:spcBef>
-                <a:spcPts val="1400"/>
-              </a:spcBef>
-              <a:defRPr sz="2200">
-                <a:solidFill>
-                  <a:srgbClr val="323232"/>
-                </a:solidFill>
-              </a:defRPr>
-            </a:pPr>
-            <a:r>
-              <a:t>• Capacitación en Tableros</a:t>
-            </a:r>
-          </a:p>
-          <a:p>
-            <a:pPr>
-              <a:spcBef>
-                <a:spcPts val="1400"/>
-              </a:spcBef>
-              <a:defRPr sz="2200">
-                <a:solidFill>
-                  <a:srgbClr val="323232"/>
-                </a:solidFill>
-              </a:defRPr>
-            </a:pPr>
-            <a:r>
-              <a:t>• Integración CI/CD</a:t>
-            </a:r>
-          </a:p>
-        </p:txBody>
-      </p:sp>
-    </p:spTree>
-  </p:cSld>
-  <p:clrMapOvr>
-    <a:masterClrMapping/>
-  </p:clrMapOvr>
-</p:sld>
-</file>
-
-<file path=ppt/slides/slide12.xml><?xml version="1.0" encoding="utf-8"?>
-<p:sld xmlns:a="http://schemas.openxmlformats.org/drawingml/2006/main" xmlns:p="http://schemas.openxmlformats.org/presentationml/2006/main" xmlns:r="http://schemas.openxmlformats.org/officeDocument/2006/relationships">
-  <p:cSld>
-    <p:spTree>
-      <p:nvGrpSpPr>
-        <p:cNvPr id="1" name=""/>
-        <p:cNvGrpSpPr/>
-        <p:nvPr/>
-      </p:nvGrpSpPr>
-      <p:grpSpPr/>
-      <p:sp>
-        <p:nvSpPr>
-          <p:cNvPr id="2" name="Rectangle 1"/>
-          <p:cNvSpPr/>
-          <p:nvPr/>
-        </p:nvSpPr>
-        <p:spPr>
-          <a:xfrm>
-            <a:off x="0" y="0"/>
-            <a:ext cx="12191695" cy="1097280"/>
-          </a:xfrm>
-          <a:prstGeom prst="rect">
-            <a:avLst/>
-          </a:prstGeom>
-          <a:solidFill>
-            <a:srgbClr val="1E3A5F"/>
-          </a:solidFill>
-          <a:ln>
-            <a:solidFill>
-              <a:srgbClr val="1E3A5F"/>
-            </a:solidFill>
-          </a:ln>
-        </p:spPr>
-        <p:style>
-          <a:lnRef idx="1">
-            <a:schemeClr val="accent1"/>
-          </a:lnRef>
-          <a:fillRef idx="3">
-            <a:schemeClr val="accent1"/>
-          </a:fillRef>
-          <a:effectRef idx="2">
-            <a:schemeClr val="accent1"/>
-          </a:effectRef>
-          <a:fontRef idx="minor">
-            <a:schemeClr val="lt1"/>
-          </a:fontRef>
-        </p:style>
-        <p:txBody>
-          <a:bodyPr rtlCol="0" anchor="ctr"/>
-          <a:lstStyle/>
-          <a:p>
-            <a:pPr algn="ctr"/>
-          </a:p>
-        </p:txBody>
-      </p:sp>
-      <p:sp>
-        <p:nvSpPr>
-          <p:cNvPr id="3" name="Rectangle 2"/>
-          <p:cNvSpPr/>
-          <p:nvPr/>
-        </p:nvSpPr>
-        <p:spPr>
-          <a:xfrm>
-            <a:off x="0" y="1097280"/>
-            <a:ext cx="12191695" cy="91440"/>
-          </a:xfrm>
-          <a:prstGeom prst="rect">
-            <a:avLst/>
-          </a:prstGeom>
-          <a:solidFill>
-            <a:srgbClr val="3B82F6"/>
-          </a:solidFill>
-          <a:ln>
-            <a:solidFill>
-              <a:srgbClr val="3B82F6"/>
-            </a:solidFill>
-          </a:ln>
-        </p:spPr>
-        <p:style>
-          <a:lnRef idx="1">
-            <a:schemeClr val="accent1"/>
-          </a:lnRef>
-          <a:fillRef idx="3">
-            <a:schemeClr val="accent1"/>
-          </a:fillRef>
-          <a:effectRef idx="2">
-            <a:schemeClr val="accent1"/>
-          </a:effectRef>
-          <a:fontRef idx="minor">
-            <a:schemeClr val="lt1"/>
-          </a:fontRef>
-        </p:style>
-        <p:txBody>
-          <a:bodyPr rtlCol="0" anchor="ctr"/>
-          <a:lstStyle/>
-          <a:p>
-            <a:pPr algn="ctr"/>
-          </a:p>
-        </p:txBody>
-      </p:sp>
-      <p:sp>
-        <p:nvSpPr>
-          <p:cNvPr id="4" name="TextBox 3"/>
-          <p:cNvSpPr txBox="1"/>
-          <p:nvPr/>
-        </p:nvSpPr>
-        <p:spPr>
-          <a:xfrm>
-            <a:off x="457200" y="91440"/>
-            <a:ext cx="11277295" cy="914400"/>
-          </a:xfrm>
-          <a:prstGeom prst="rect">
-            <a:avLst/>
-          </a:prstGeom>
-          <a:noFill/>
-        </p:spPr>
-        <p:txBody>
-          <a:bodyPr wrap="none">
-            <a:spAutoFit/>
-          </a:bodyPr>
-          <a:lstStyle/>
-          <a:p>
-            <a:pPr>
-              <a:defRPr b="1" sz="3600">
-                <a:solidFill>
-                  <a:srgbClr val="FFFFFF"/>
-                </a:solidFill>
-              </a:defRPr>
-            </a:pPr>
-            <a:r>
-              <a:t>Gracias</a:t>
-            </a:r>
-          </a:p>
-        </p:txBody>
-      </p:sp>
-      <p:sp>
-        <p:nvSpPr>
-          <p:cNvPr id="5" name="TextBox 4"/>
-          <p:cNvSpPr txBox="1"/>
-          <p:nvPr/>
-        </p:nvSpPr>
-        <p:spPr>
-          <a:xfrm>
-            <a:off x="457200" y="1645920"/>
-            <a:ext cx="11277295" cy="5029200"/>
-          </a:xfrm>
-          <a:prstGeom prst="rect">
-            <a:avLst/>
-          </a:prstGeom>
-          <a:noFill/>
-        </p:spPr>
-        <p:txBody>
-          <a:bodyPr wrap="square">
-            <a:spAutoFit/>
-          </a:bodyPr>
-          <a:lstStyle/>
-          <a:p>
-            <a:pPr>
-              <a:defRPr sz="2200">
-                <a:solidFill>
-                  <a:srgbClr val="323232"/>
-                </a:solidFill>
-              </a:defRPr>
-            </a:pPr>
-            <a:r>
-              <a:t>Transformando código en valor de negocio.</a:t>
-            </a:r>
-          </a:p>
-          <a:p>
-            <a:pPr>
-              <a:spcBef>
-                <a:spcPts val="1400"/>
-              </a:spcBef>
-              <a:defRPr sz="2200">
-                <a:solidFill>
-                  <a:srgbClr val="323232"/>
-                </a:solidFill>
-              </a:defRPr>
-            </a:pPr>
-            <a:r>
-              <a:t>• adopcion@evolith.com</a:t>
+              </a:rPr>
+              <a:t>CORE</a:t>
             </a:r>
           </a:p>
         </p:txBody>
@@ -3874,6 +3258,14 @@
 <file path=ppt/slides/slide2.xml><?xml version="1.0" encoding="utf-8"?>
 <p:sld xmlns:a="http://schemas.openxmlformats.org/drawingml/2006/main" xmlns:p="http://schemas.openxmlformats.org/presentationml/2006/main" xmlns:r="http://schemas.openxmlformats.org/officeDocument/2006/relationships">
   <p:cSld>
+    <p:bg>
+      <p:bgPr>
+        <a:solidFill>
+          <a:srgbClr val="121212"/>
+        </a:solidFill>
+        <a:effectLst/>
+      </p:bgPr>
+    </p:bg>
     <p:spTree>
       <p:nvGrpSpPr>
         <p:cNvPr id="1" name=""/>
@@ -3883,24 +3275,22 @@
       <p:grpSpPr/>
       <p:sp>
         <p:nvSpPr>
-          <p:cNvPr id="2" name="Rectangle 1"/>
+          <p:cNvPr id="2" name="Rounded Rectangle 1"/>
           <p:cNvSpPr/>
           <p:nvPr/>
         </p:nvSpPr>
         <p:spPr>
           <a:xfrm>
-            <a:off x="0" y="0"/>
-            <a:ext cx="12191695" cy="1097280"/>
+            <a:off x="457200" y="1828800"/>
+            <a:ext cx="1828800" cy="914400"/>
           </a:xfrm>
-          <a:prstGeom prst="rect">
+          <a:prstGeom prst="roundRect">
             <a:avLst/>
           </a:prstGeom>
-          <a:solidFill>
-            <a:srgbClr val="1E3A5F"/>
-          </a:solidFill>
-          <a:ln>
+          <a:noFill/>
+          <a:ln w="25400">
             <a:solidFill>
-              <a:srgbClr val="1E3A5F"/>
+              <a:srgbClr val="960000"/>
             </a:solidFill>
           </a:ln>
         </p:spPr>
@@ -3923,29 +3313,46 @@
           <a:lstStyle/>
           <a:p>
             <a:pPr algn="ctr"/>
-          </a:p>
-        </p:txBody>
-      </p:sp>
-      <p:sp>
-        <p:nvSpPr>
-          <p:cNvPr id="3" name="Rectangle 2"/>
+            <a:r>
+              <a:rPr sz="1400" b="1">
+                <a:solidFill>
+                  <a:srgbClr val="960000"/>
+                </a:solidFill>
+              </a:rPr>
+              <a:t>Silos de</a:t>
+            </a:r>
+          </a:p>
+          <a:p>
+            <a:pPr algn="ctr"/>
+            <a:r>
+              <a:rPr sz="1400" b="1">
+                <a:solidFill>
+                  <a:srgbClr val="960000"/>
+                </a:solidFill>
+              </a:rPr>
+              <a:t>Negocio</a:t>
+            </a:r>
+          </a:p>
+        </p:txBody>
+      </p:sp>
+      <p:sp>
+        <p:nvSpPr>
+          <p:cNvPr id="3" name="Rounded Rectangle 2"/>
           <p:cNvSpPr/>
           <p:nvPr/>
         </p:nvSpPr>
         <p:spPr>
           <a:xfrm>
-            <a:off x="0" y="1097280"/>
-            <a:ext cx="12191695" cy="91440"/>
+            <a:off x="3657600" y="1828800"/>
+            <a:ext cx="1828800" cy="914400"/>
           </a:xfrm>
-          <a:prstGeom prst="rect">
+          <a:prstGeom prst="roundRect">
             <a:avLst/>
           </a:prstGeom>
-          <a:solidFill>
-            <a:srgbClr val="3B82F6"/>
-          </a:solidFill>
-          <a:ln>
+          <a:noFill/>
+          <a:ln w="25400">
             <a:solidFill>
-              <a:srgbClr val="3B82F6"/>
+              <a:srgbClr val="960000"/>
             </a:solidFill>
           </a:ln>
         </p:spPr>
@@ -3968,105 +3375,484 @@
           <a:lstStyle/>
           <a:p>
             <a:pPr algn="ctr"/>
-          </a:p>
-        </p:txBody>
-      </p:sp>
-      <p:sp>
-        <p:nvSpPr>
-          <p:cNvPr id="4" name="TextBox 3"/>
-          <p:cNvSpPr txBox="1"/>
+            <a:r>
+              <a:rPr sz="1400" b="1">
+                <a:solidFill>
+                  <a:srgbClr val="960000"/>
+                </a:solidFill>
+              </a:rPr>
+              <a:t>Desarrollo</a:t>
+            </a:r>
+          </a:p>
+          <a:p>
+            <a:pPr algn="ctr"/>
+            <a:r>
+              <a:rPr sz="1400" b="1">
+                <a:solidFill>
+                  <a:srgbClr val="960000"/>
+                </a:solidFill>
+              </a:rPr>
+              <a:t>Aislado</a:t>
+            </a:r>
+          </a:p>
+        </p:txBody>
+      </p:sp>
+      <p:sp>
+        <p:nvSpPr>
+          <p:cNvPr id="4" name="Rounded Rectangle 3"/>
+          <p:cNvSpPr/>
           <p:nvPr/>
         </p:nvSpPr>
         <p:spPr>
           <a:xfrm>
-            <a:off x="457200" y="91440"/>
-            <a:ext cx="11277295" cy="914400"/>
+            <a:off x="6858000" y="1828800"/>
+            <a:ext cx="1828800" cy="914400"/>
           </a:xfrm>
-          <a:prstGeom prst="rect">
+          <a:prstGeom prst="roundRect">
             <a:avLst/>
           </a:prstGeom>
           <a:noFill/>
+          <a:ln w="25400">
+            <a:solidFill>
+              <a:srgbClr val="960000"/>
+            </a:solidFill>
+          </a:ln>
         </p:spPr>
-        <p:txBody>
-          <a:bodyPr wrap="none">
-            <a:spAutoFit/>
-          </a:bodyPr>
-          <a:lstStyle/>
-          <a:p>
-            <a:pPr>
-              <a:defRPr b="1" sz="3600">
+        <p:style>
+          <a:lnRef idx="1">
+            <a:schemeClr val="accent1"/>
+          </a:lnRef>
+          <a:fillRef idx="3">
+            <a:schemeClr val="accent1"/>
+          </a:fillRef>
+          <a:effectRef idx="2">
+            <a:schemeClr val="accent1"/>
+          </a:effectRef>
+          <a:fontRef idx="minor">
+            <a:schemeClr val="lt1"/>
+          </a:fontRef>
+        </p:style>
+        <p:txBody>
+          <a:bodyPr rtlCol="0" anchor="ctr"/>
+          <a:lstStyle/>
+          <a:p>
+            <a:pPr algn="ctr"/>
+            <a:r>
+              <a:rPr sz="1400" b="1">
                 <a:solidFill>
-                  <a:srgbClr val="FFFFFF"/>
+                  <a:srgbClr val="960000"/>
                 </a:solidFill>
-              </a:defRPr>
-            </a:pPr>
-            <a:r>
-              <a:t>¿Qué es Evolith y por qué es vital?</a:t>
-            </a:r>
-          </a:p>
-        </p:txBody>
-      </p:sp>
-      <p:sp>
-        <p:nvSpPr>
-          <p:cNvPr id="5" name="TextBox 4"/>
-          <p:cNvSpPr txBox="1"/>
+              </a:rPr>
+              <a:t>QA</a:t>
+            </a:r>
+          </a:p>
+          <a:p>
+            <a:pPr algn="ctr"/>
+            <a:r>
+              <a:rPr sz="1400" b="1">
+                <a:solidFill>
+                  <a:srgbClr val="960000"/>
+                </a:solidFill>
+              </a:rPr>
+              <a:t>Tardío</a:t>
+            </a:r>
+          </a:p>
+        </p:txBody>
+      </p:sp>
+      <p:sp>
+        <p:nvSpPr>
+          <p:cNvPr id="5" name="Rounded Rectangle 4"/>
+          <p:cNvSpPr/>
           <p:nvPr/>
         </p:nvSpPr>
         <p:spPr>
           <a:xfrm>
-            <a:off x="457200" y="1645920"/>
-            <a:ext cx="11277295" cy="5029200"/>
+            <a:off x="457200" y="4114800"/>
+            <a:ext cx="8229600" cy="1828800"/>
           </a:xfrm>
-          <a:prstGeom prst="rect">
+          <a:prstGeom prst="roundRect">
             <a:avLst/>
           </a:prstGeom>
           <a:noFill/>
+          <a:ln w="25400">
+            <a:solidFill>
+              <a:srgbClr val="CAC5B2"/>
+            </a:solidFill>
+          </a:ln>
         </p:spPr>
-        <p:txBody>
-          <a:bodyPr wrap="square">
-            <a:spAutoFit/>
-          </a:bodyPr>
-          <a:lstStyle/>
-          <a:p>
-            <a:pPr>
-              <a:defRPr sz="2200">
+        <p:style>
+          <a:lnRef idx="1">
+            <a:schemeClr val="accent1"/>
+          </a:lnRef>
+          <a:fillRef idx="3">
+            <a:schemeClr val="accent1"/>
+          </a:fillRef>
+          <a:effectRef idx="2">
+            <a:schemeClr val="accent1"/>
+          </a:effectRef>
+          <a:fontRef idx="minor">
+            <a:schemeClr val="lt1"/>
+          </a:fontRef>
+        </p:style>
+        <p:txBody>
+          <a:bodyPr rtlCol="0" anchor="ctr"/>
+          <a:lstStyle/>
+          <a:p>
+            <a:pPr algn="ctr"/>
+            <a:r>
+              <a:rPr sz="1400" b="1">
                 <a:solidFill>
-                  <a:srgbClr val="323232"/>
+                  <a:srgbClr val="CAC5B2"/>
                 </a:solidFill>
-              </a:defRPr>
-            </a:pPr>
-            <a:r>
-              <a:t>Qué es: Un marco de gobernanza corporativo (SDLC en 8 fases).</a:t>
-            </a:r>
-          </a:p>
-          <a:p>
-            <a:pPr>
-              <a:spcBef>
-                <a:spcPts val="1400"/>
-              </a:spcBef>
-              <a:defRPr sz="2200">
+              </a:rPr>
+              <a:t>Gobernanza SDLC Evolith (End-to-End Trazabilidad)</a:t>
+            </a:r>
+          </a:p>
+        </p:txBody>
+      </p:sp>
+      <p:sp>
+        <p:nvSpPr>
+          <p:cNvPr id="6" name="Rounded Rectangle 5"/>
+          <p:cNvSpPr/>
+          <p:nvPr/>
+        </p:nvSpPr>
+        <p:spPr>
+          <a:xfrm>
+            <a:off x="914400" y="4572000"/>
+            <a:ext cx="1371600" cy="914400"/>
+          </a:xfrm>
+          <a:prstGeom prst="roundRect">
+            <a:avLst/>
+          </a:prstGeom>
+          <a:solidFill>
+            <a:srgbClr val="CAC5B2"/>
+          </a:solidFill>
+          <a:ln w="25400">
+            <a:solidFill>
+              <a:srgbClr val="121212"/>
+            </a:solidFill>
+          </a:ln>
+        </p:spPr>
+        <p:style>
+          <a:lnRef idx="1">
+            <a:schemeClr val="accent1"/>
+          </a:lnRef>
+          <a:fillRef idx="3">
+            <a:schemeClr val="accent1"/>
+          </a:fillRef>
+          <a:effectRef idx="2">
+            <a:schemeClr val="accent1"/>
+          </a:effectRef>
+          <a:fontRef idx="minor">
+            <a:schemeClr val="lt1"/>
+          </a:fontRef>
+        </p:style>
+        <p:txBody>
+          <a:bodyPr rtlCol="0" anchor="ctr"/>
+          <a:lstStyle/>
+          <a:p>
+            <a:pPr algn="ctr"/>
+            <a:r>
+              <a:rPr sz="1400" b="1">
                 <a:solidFill>
-                  <a:srgbClr val="323232"/>
+                  <a:srgbClr val="121212"/>
                 </a:solidFill>
-              </a:defRPr>
-            </a:pPr>
-            <a:r>
-              <a:t>• Qué resuelve: Elimina la deuda técnica y el riesgo de delivery.</a:t>
-            </a:r>
-          </a:p>
-          <a:p>
-            <a:pPr>
-              <a:spcBef>
-                <a:spcPts val="1400"/>
-              </a:spcBef>
-              <a:defRPr sz="2200">
+              </a:rPr>
+              <a:t>Ideación</a:t>
+            </a:r>
+          </a:p>
+        </p:txBody>
+      </p:sp>
+      <p:sp>
+        <p:nvSpPr>
+          <p:cNvPr id="7" name="Right Arrow 6"/>
+          <p:cNvSpPr/>
+          <p:nvPr/>
+        </p:nvSpPr>
+        <p:spPr>
+          <a:xfrm>
+            <a:off x="2377440" y="4846320"/>
+            <a:ext cx="365760" cy="365760"/>
+          </a:xfrm>
+          <a:prstGeom prst="rightArrow">
+            <a:avLst/>
+          </a:prstGeom>
+          <a:solidFill>
+            <a:srgbClr val="CAC5B2"/>
+          </a:solidFill>
+          <a:ln>
+            <a:solidFill>
+              <a:srgbClr val="CAC5B2"/>
+            </a:solidFill>
+          </a:ln>
+        </p:spPr>
+        <p:style>
+          <a:lnRef idx="1">
+            <a:schemeClr val="accent1"/>
+          </a:lnRef>
+          <a:fillRef idx="3">
+            <a:schemeClr val="accent1"/>
+          </a:fillRef>
+          <a:effectRef idx="2">
+            <a:schemeClr val="accent1"/>
+          </a:effectRef>
+          <a:fontRef idx="minor">
+            <a:schemeClr val="lt1"/>
+          </a:fontRef>
+        </p:style>
+        <p:txBody>
+          <a:bodyPr rtlCol="0" anchor="ctr"/>
+          <a:lstStyle/>
+          <a:p>
+            <a:pPr algn="ctr"/>
+          </a:p>
+        </p:txBody>
+      </p:sp>
+      <p:sp>
+        <p:nvSpPr>
+          <p:cNvPr id="8" name="Rounded Rectangle 7"/>
+          <p:cNvSpPr/>
+          <p:nvPr/>
+        </p:nvSpPr>
+        <p:spPr>
+          <a:xfrm>
+            <a:off x="2834640" y="4572000"/>
+            <a:ext cx="1371600" cy="914400"/>
+          </a:xfrm>
+          <a:prstGeom prst="roundRect">
+            <a:avLst/>
+          </a:prstGeom>
+          <a:solidFill>
+            <a:srgbClr val="CAC5B2"/>
+          </a:solidFill>
+          <a:ln w="25400">
+            <a:solidFill>
+              <a:srgbClr val="121212"/>
+            </a:solidFill>
+          </a:ln>
+        </p:spPr>
+        <p:style>
+          <a:lnRef idx="1">
+            <a:schemeClr val="accent1"/>
+          </a:lnRef>
+          <a:fillRef idx="3">
+            <a:schemeClr val="accent1"/>
+          </a:fillRef>
+          <a:effectRef idx="2">
+            <a:schemeClr val="accent1"/>
+          </a:effectRef>
+          <a:fontRef idx="minor">
+            <a:schemeClr val="lt1"/>
+          </a:fontRef>
+        </p:style>
+        <p:txBody>
+          <a:bodyPr rtlCol="0" anchor="ctr"/>
+          <a:lstStyle/>
+          <a:p>
+            <a:pPr algn="ctr"/>
+            <a:r>
+              <a:rPr sz="1400" b="1">
                 <a:solidFill>
-                  <a:srgbClr val="323232"/>
+                  <a:srgbClr val="121212"/>
                 </a:solidFill>
-              </a:defRPr>
-            </a:pPr>
-            <a:r>
-              <a:t>• Cómo lo hace: Roles RACI, artefactos obligatorios, Quality Gates.</a:t>
+              </a:rPr>
+              <a:t>Construcción</a:t>
+            </a:r>
+          </a:p>
+        </p:txBody>
+      </p:sp>
+      <p:sp>
+        <p:nvSpPr>
+          <p:cNvPr id="9" name="Right Arrow 8"/>
+          <p:cNvSpPr/>
+          <p:nvPr/>
+        </p:nvSpPr>
+        <p:spPr>
+          <a:xfrm>
+            <a:off x="4297680" y="4846320"/>
+            <a:ext cx="365760" cy="365760"/>
+          </a:xfrm>
+          <a:prstGeom prst="rightArrow">
+            <a:avLst/>
+          </a:prstGeom>
+          <a:solidFill>
+            <a:srgbClr val="CAC5B2"/>
+          </a:solidFill>
+          <a:ln>
+            <a:solidFill>
+              <a:srgbClr val="CAC5B2"/>
+            </a:solidFill>
+          </a:ln>
+        </p:spPr>
+        <p:style>
+          <a:lnRef idx="1">
+            <a:schemeClr val="accent1"/>
+          </a:lnRef>
+          <a:fillRef idx="3">
+            <a:schemeClr val="accent1"/>
+          </a:fillRef>
+          <a:effectRef idx="2">
+            <a:schemeClr val="accent1"/>
+          </a:effectRef>
+          <a:fontRef idx="minor">
+            <a:schemeClr val="lt1"/>
+          </a:fontRef>
+        </p:style>
+        <p:txBody>
+          <a:bodyPr rtlCol="0" anchor="ctr"/>
+          <a:lstStyle/>
+          <a:p>
+            <a:pPr algn="ctr"/>
+          </a:p>
+        </p:txBody>
+      </p:sp>
+      <p:sp>
+        <p:nvSpPr>
+          <p:cNvPr id="10" name="Rounded Rectangle 9"/>
+          <p:cNvSpPr/>
+          <p:nvPr/>
+        </p:nvSpPr>
+        <p:spPr>
+          <a:xfrm>
+            <a:off x="4754880" y="4572000"/>
+            <a:ext cx="1371600" cy="914400"/>
+          </a:xfrm>
+          <a:prstGeom prst="roundRect">
+            <a:avLst/>
+          </a:prstGeom>
+          <a:solidFill>
+            <a:srgbClr val="CAC5B2"/>
+          </a:solidFill>
+          <a:ln w="25400">
+            <a:solidFill>
+              <a:srgbClr val="121212"/>
+            </a:solidFill>
+          </a:ln>
+        </p:spPr>
+        <p:style>
+          <a:lnRef idx="1">
+            <a:schemeClr val="accent1"/>
+          </a:lnRef>
+          <a:fillRef idx="3">
+            <a:schemeClr val="accent1"/>
+          </a:fillRef>
+          <a:effectRef idx="2">
+            <a:schemeClr val="accent1"/>
+          </a:effectRef>
+          <a:fontRef idx="minor">
+            <a:schemeClr val="lt1"/>
+          </a:fontRef>
+        </p:style>
+        <p:txBody>
+          <a:bodyPr rtlCol="0" anchor="ctr"/>
+          <a:lstStyle/>
+          <a:p>
+            <a:pPr algn="ctr"/>
+            <a:r>
+              <a:rPr sz="1400" b="1">
+                <a:solidFill>
+                  <a:srgbClr val="121212"/>
+                </a:solidFill>
+              </a:rPr>
+              <a:t>Quality Gates</a:t>
+            </a:r>
+          </a:p>
+        </p:txBody>
+      </p:sp>
+      <p:sp>
+        <p:nvSpPr>
+          <p:cNvPr id="11" name="Right Arrow 10"/>
+          <p:cNvSpPr/>
+          <p:nvPr/>
+        </p:nvSpPr>
+        <p:spPr>
+          <a:xfrm>
+            <a:off x="6217920" y="4846320"/>
+            <a:ext cx="365760" cy="365760"/>
+          </a:xfrm>
+          <a:prstGeom prst="rightArrow">
+            <a:avLst/>
+          </a:prstGeom>
+          <a:solidFill>
+            <a:srgbClr val="CAC5B2"/>
+          </a:solidFill>
+          <a:ln>
+            <a:solidFill>
+              <a:srgbClr val="CAC5B2"/>
+            </a:solidFill>
+          </a:ln>
+        </p:spPr>
+        <p:style>
+          <a:lnRef idx="1">
+            <a:schemeClr val="accent1"/>
+          </a:lnRef>
+          <a:fillRef idx="3">
+            <a:schemeClr val="accent1"/>
+          </a:fillRef>
+          <a:effectRef idx="2">
+            <a:schemeClr val="accent1"/>
+          </a:effectRef>
+          <a:fontRef idx="minor">
+            <a:schemeClr val="lt1"/>
+          </a:fontRef>
+        </p:style>
+        <p:txBody>
+          <a:bodyPr rtlCol="0" anchor="ctr"/>
+          <a:lstStyle/>
+          <a:p>
+            <a:pPr algn="ctr"/>
+          </a:p>
+        </p:txBody>
+      </p:sp>
+      <p:sp>
+        <p:nvSpPr>
+          <p:cNvPr id="12" name="Rounded Rectangle 11"/>
+          <p:cNvSpPr/>
+          <p:nvPr/>
+        </p:nvSpPr>
+        <p:spPr>
+          <a:xfrm>
+            <a:off x="6675120" y="4572000"/>
+            <a:ext cx="1371600" cy="914400"/>
+          </a:xfrm>
+          <a:prstGeom prst="roundRect">
+            <a:avLst/>
+          </a:prstGeom>
+          <a:solidFill>
+            <a:srgbClr val="CAC5B2"/>
+          </a:solidFill>
+          <a:ln w="25400">
+            <a:solidFill>
+              <a:srgbClr val="121212"/>
+            </a:solidFill>
+          </a:ln>
+        </p:spPr>
+        <p:style>
+          <a:lnRef idx="1">
+            <a:schemeClr val="accent1"/>
+          </a:lnRef>
+          <a:fillRef idx="3">
+            <a:schemeClr val="accent1"/>
+          </a:fillRef>
+          <a:effectRef idx="2">
+            <a:schemeClr val="accent1"/>
+          </a:effectRef>
+          <a:fontRef idx="minor">
+            <a:schemeClr val="lt1"/>
+          </a:fontRef>
+        </p:style>
+        <p:txBody>
+          <a:bodyPr rtlCol="0" anchor="ctr"/>
+          <a:lstStyle/>
+          <a:p>
+            <a:pPr algn="ctr"/>
+            <a:r>
+              <a:rPr sz="1400" b="1">
+                <a:solidFill>
+                  <a:srgbClr val="121212"/>
+                </a:solidFill>
+              </a:rPr>
+              <a:t>Producción</a:t>
             </a:r>
           </a:p>
         </p:txBody>
@@ -4082,6 +3868,14 @@
 <file path=ppt/slides/slide3.xml><?xml version="1.0" encoding="utf-8"?>
 <p:sld xmlns:a="http://schemas.openxmlformats.org/drawingml/2006/main" xmlns:p="http://schemas.openxmlformats.org/presentationml/2006/main" xmlns:r="http://schemas.openxmlformats.org/officeDocument/2006/relationships">
   <p:cSld>
+    <p:bg>
+      <p:bgPr>
+        <a:solidFill>
+          <a:srgbClr val="121212"/>
+        </a:solidFill>
+        <a:effectLst/>
+      </p:bgPr>
+    </p:bg>
     <p:spTree>
       <p:nvGrpSpPr>
         <p:cNvPr id="1" name=""/>
@@ -4091,24 +3885,22 @@
       <p:grpSpPr/>
       <p:sp>
         <p:nvSpPr>
-          <p:cNvPr id="2" name="Rectangle 1"/>
+          <p:cNvPr id="2" name="Rounded Rectangle 1"/>
           <p:cNvSpPr/>
           <p:nvPr/>
         </p:nvSpPr>
         <p:spPr>
           <a:xfrm>
-            <a:off x="0" y="0"/>
-            <a:ext cx="12191695" cy="1097280"/>
+            <a:off x="457200" y="1828800"/>
+            <a:ext cx="8229600" cy="1097280"/>
           </a:xfrm>
-          <a:prstGeom prst="rect">
+          <a:prstGeom prst="roundRect">
             <a:avLst/>
           </a:prstGeom>
-          <a:solidFill>
-            <a:srgbClr val="1E3A5F"/>
-          </a:solidFill>
-          <a:ln>
+          <a:noFill/>
+          <a:ln w="25400">
             <a:solidFill>
-              <a:srgbClr val="1E3A5F"/>
+              <a:srgbClr val="FFFFFF"/>
             </a:solidFill>
           </a:ln>
         </p:spPr>
@@ -4131,29 +3923,35 @@
           <a:lstStyle/>
           <a:p>
             <a:pPr algn="ctr"/>
-          </a:p>
-        </p:txBody>
-      </p:sp>
-      <p:sp>
-        <p:nvSpPr>
-          <p:cNvPr id="3" name="Rectangle 2"/>
+            <a:r>
+              <a:rPr sz="1400" b="1">
+                <a:solidFill>
+                  <a:srgbClr val="FFFFFF"/>
+                </a:solidFill>
+              </a:rPr>
+              <a:t>Negocio (Sponsor, PO)</a:t>
+            </a:r>
+          </a:p>
+        </p:txBody>
+      </p:sp>
+      <p:sp>
+        <p:nvSpPr>
+          <p:cNvPr id="3" name="Rounded Rectangle 2"/>
           <p:cNvSpPr/>
           <p:nvPr/>
         </p:nvSpPr>
         <p:spPr>
           <a:xfrm>
-            <a:off x="0" y="1097280"/>
-            <a:ext cx="12191695" cy="91440"/>
+            <a:off x="457200" y="3200400"/>
+            <a:ext cx="8229600" cy="1097280"/>
           </a:xfrm>
-          <a:prstGeom prst="rect">
+          <a:prstGeom prst="roundRect">
             <a:avLst/>
           </a:prstGeom>
-          <a:solidFill>
-            <a:srgbClr val="3B82F6"/>
-          </a:solidFill>
-          <a:ln>
+          <a:noFill/>
+          <a:ln w="25400">
             <a:solidFill>
-              <a:srgbClr val="3B82F6"/>
+              <a:srgbClr val="FFFFFF"/>
             </a:solidFill>
           </a:ln>
         </p:spPr>
@@ -4176,162 +3974,35 @@
           <a:lstStyle/>
           <a:p>
             <a:pPr algn="ctr"/>
-          </a:p>
-        </p:txBody>
-      </p:sp>
-      <p:sp>
-        <p:nvSpPr>
-          <p:cNvPr id="4" name="TextBox 3"/>
-          <p:cNvSpPr txBox="1"/>
+            <a:r>
+              <a:rPr sz="1400" b="1">
+                <a:solidFill>
+                  <a:srgbClr val="FFFFFF"/>
+                </a:solidFill>
+              </a:rPr>
+              <a:t>Ingeniería (Arquitectura, Devs)</a:t>
+            </a:r>
+          </a:p>
+        </p:txBody>
+      </p:sp>
+      <p:sp>
+        <p:nvSpPr>
+          <p:cNvPr id="4" name="Rounded Rectangle 3"/>
+          <p:cNvSpPr/>
           <p:nvPr/>
         </p:nvSpPr>
         <p:spPr>
           <a:xfrm>
-            <a:off x="457200" y="91440"/>
-            <a:ext cx="11277295" cy="914400"/>
+            <a:off x="457200" y="4572000"/>
+            <a:ext cx="8229600" cy="1097280"/>
           </a:xfrm>
-          <a:prstGeom prst="rect">
+          <a:prstGeom prst="roundRect">
             <a:avLst/>
           </a:prstGeom>
           <a:noFill/>
-        </p:spPr>
-        <p:txBody>
-          <a:bodyPr wrap="none">
-            <a:spAutoFit/>
-          </a:bodyPr>
-          <a:lstStyle/>
-          <a:p>
-            <a:pPr>
-              <a:defRPr b="1" sz="3600">
-                <a:solidFill>
-                  <a:srgbClr val="FFFFFF"/>
-                </a:solidFill>
-              </a:defRPr>
-            </a:pPr>
-            <a:r>
-              <a:t>El Costo del SDLC Tradicional</a:t>
-            </a:r>
-          </a:p>
-        </p:txBody>
-      </p:sp>
-      <p:sp>
-        <p:nvSpPr>
-          <p:cNvPr id="5" name="TextBox 4"/>
-          <p:cNvSpPr txBox="1"/>
-          <p:nvPr/>
-        </p:nvSpPr>
-        <p:spPr>
-          <a:xfrm>
-            <a:off x="457200" y="1645920"/>
-            <a:ext cx="11277295" cy="5029200"/>
-          </a:xfrm>
-          <a:prstGeom prst="rect">
-            <a:avLst/>
-          </a:prstGeom>
-          <a:noFill/>
-        </p:spPr>
-        <p:txBody>
-          <a:bodyPr wrap="square">
-            <a:spAutoFit/>
-          </a:bodyPr>
-          <a:lstStyle/>
-          <a:p>
-            <a:pPr>
-              <a:defRPr sz="2200">
-                <a:solidFill>
-                  <a:srgbClr val="323232"/>
-                </a:solidFill>
-              </a:defRPr>
-            </a:pPr>
-            <a:r>
-              <a:t>Desarrollo en silos sin visibilidad.</a:t>
-            </a:r>
-          </a:p>
-          <a:p>
-            <a:pPr>
-              <a:spcBef>
-                <a:spcPts val="1400"/>
-              </a:spcBef>
-              <a:defRPr sz="2200">
-                <a:solidFill>
-                  <a:srgbClr val="323232"/>
-                </a:solidFill>
-              </a:defRPr>
-            </a:pPr>
-            <a:r>
-              <a:t>• Deuda técnica acumulada que ralentiza features.</a:t>
-            </a:r>
-          </a:p>
-          <a:p>
-            <a:pPr>
-              <a:spcBef>
-                <a:spcPts val="1400"/>
-              </a:spcBef>
-              <a:defRPr sz="2200">
-                <a:solidFill>
-                  <a:srgbClr val="323232"/>
-                </a:solidFill>
-              </a:defRPr>
-            </a:pPr>
-            <a:r>
-              <a:t>• Descubrimiento de defectos críticos en producción.</a:t>
-            </a:r>
-          </a:p>
-          <a:p>
-            <a:pPr>
-              <a:spcBef>
-                <a:spcPts val="1400"/>
-              </a:spcBef>
-              <a:defRPr sz="2200">
-                <a:solidFill>
-                  <a:srgbClr val="323232"/>
-                </a:solidFill>
-              </a:defRPr>
-            </a:pPr>
-            <a:r>
-              <a:t>• Auditorías fallidas y vulnerabilidades.</a:t>
-            </a:r>
-          </a:p>
-        </p:txBody>
-      </p:sp>
-    </p:spTree>
-  </p:cSld>
-  <p:clrMapOvr>
-    <a:masterClrMapping/>
-  </p:clrMapOvr>
-</p:sld>
-</file>
-
-<file path=ppt/slides/slide4.xml><?xml version="1.0" encoding="utf-8"?>
-<p:sld xmlns:a="http://schemas.openxmlformats.org/drawingml/2006/main" xmlns:p="http://schemas.openxmlformats.org/presentationml/2006/main" xmlns:r="http://schemas.openxmlformats.org/officeDocument/2006/relationships">
-  <p:cSld>
-    <p:spTree>
-      <p:nvGrpSpPr>
-        <p:cNvPr id="1" name=""/>
-        <p:cNvGrpSpPr/>
-        <p:nvPr/>
-      </p:nvGrpSpPr>
-      <p:grpSpPr/>
-      <p:sp>
-        <p:nvSpPr>
-          <p:cNvPr id="2" name="Rectangle 1"/>
-          <p:cNvSpPr/>
-          <p:nvPr/>
-        </p:nvSpPr>
-        <p:spPr>
-          <a:xfrm>
-            <a:off x="0" y="0"/>
-            <a:ext cx="12191695" cy="1097280"/>
-          </a:xfrm>
-          <a:prstGeom prst="rect">
-            <a:avLst/>
-          </a:prstGeom>
-          <a:solidFill>
-            <a:srgbClr val="1E3A5F"/>
-          </a:solidFill>
-          <a:ln>
+          <a:ln w="25400">
             <a:solidFill>
-              <a:srgbClr val="1E3A5F"/>
+              <a:srgbClr val="FFFFFF"/>
             </a:solidFill>
           </a:ln>
         </p:spPr>
@@ -4354,29 +4025,37 @@
           <a:lstStyle/>
           <a:p>
             <a:pPr algn="ctr"/>
-          </a:p>
-        </p:txBody>
-      </p:sp>
-      <p:sp>
-        <p:nvSpPr>
-          <p:cNvPr id="3" name="Rectangle 2"/>
+            <a:r>
+              <a:rPr sz="1400" b="1">
+                <a:solidFill>
+                  <a:srgbClr val="FFFFFF"/>
+                </a:solidFill>
+              </a:rPr>
+              <a:t>Operaciones (QA, Release)</a:t>
+            </a:r>
+          </a:p>
+        </p:txBody>
+      </p:sp>
+      <p:sp>
+        <p:nvSpPr>
+          <p:cNvPr id="5" name="Rounded Rectangle 4"/>
           <p:cNvSpPr/>
           <p:nvPr/>
         </p:nvSpPr>
         <p:spPr>
           <a:xfrm>
-            <a:off x="0" y="1097280"/>
-            <a:ext cx="12191695" cy="91440"/>
+            <a:off x="1828800" y="2011680"/>
+            <a:ext cx="914400" cy="731520"/>
           </a:xfrm>
-          <a:prstGeom prst="rect">
+          <a:prstGeom prst="roundRect">
             <a:avLst/>
           </a:prstGeom>
           <a:solidFill>
-            <a:srgbClr val="3B82F6"/>
+            <a:srgbClr val="CAC5B2"/>
           </a:solidFill>
-          <a:ln>
+          <a:ln w="25400">
             <a:solidFill>
-              <a:srgbClr val="3B82F6"/>
+              <a:srgbClr val="121212"/>
             </a:solidFill>
           </a:ln>
         </p:spPr>
@@ -4399,177 +4078,37 @@
           <a:lstStyle/>
           <a:p>
             <a:pPr algn="ctr"/>
-          </a:p>
-        </p:txBody>
-      </p:sp>
-      <p:sp>
-        <p:nvSpPr>
-          <p:cNvPr id="4" name="TextBox 3"/>
-          <p:cNvSpPr txBox="1"/>
+            <a:r>
+              <a:rPr sz="1400" b="1">
+                <a:solidFill>
+                  <a:srgbClr val="121212"/>
+                </a:solidFill>
+              </a:rPr>
+              <a:t>Gate 1</a:t>
+            </a:r>
+          </a:p>
+        </p:txBody>
+      </p:sp>
+      <p:sp>
+        <p:nvSpPr>
+          <p:cNvPr id="6" name="Rounded Rectangle 5"/>
+          <p:cNvSpPr/>
           <p:nvPr/>
         </p:nvSpPr>
         <p:spPr>
           <a:xfrm>
-            <a:off x="457200" y="91440"/>
-            <a:ext cx="11277295" cy="914400"/>
+            <a:off x="4572000" y="3383280"/>
+            <a:ext cx="914400" cy="731520"/>
           </a:xfrm>
-          <a:prstGeom prst="rect">
-            <a:avLst/>
-          </a:prstGeom>
-          <a:noFill/>
-        </p:spPr>
-        <p:txBody>
-          <a:bodyPr wrap="none">
-            <a:spAutoFit/>
-          </a:bodyPr>
-          <a:lstStyle/>
-          <a:p>
-            <a:pPr>
-              <a:defRPr b="1" sz="3600">
-                <a:solidFill>
-                  <a:srgbClr val="FFFFFF"/>
-                </a:solidFill>
-              </a:defRPr>
-            </a:pPr>
-            <a:r>
-              <a:t>Los Pilares del Marco Evolith</a:t>
-            </a:r>
-          </a:p>
-        </p:txBody>
-      </p:sp>
-      <p:sp>
-        <p:nvSpPr>
-          <p:cNvPr id="5" name="TextBox 4"/>
-          <p:cNvSpPr txBox="1"/>
-          <p:nvPr/>
-        </p:nvSpPr>
-        <p:spPr>
-          <a:xfrm>
-            <a:off x="457200" y="1645920"/>
-            <a:ext cx="11277295" cy="5029200"/>
-          </a:xfrm>
-          <a:prstGeom prst="rect">
-            <a:avLst/>
-          </a:prstGeom>
-          <a:noFill/>
-        </p:spPr>
-        <p:txBody>
-          <a:bodyPr wrap="square">
-            <a:spAutoFit/>
-          </a:bodyPr>
-          <a:lstStyle/>
-          <a:p>
-            <a:pPr>
-              <a:defRPr sz="2200">
-                <a:solidFill>
-                  <a:srgbClr val="323232"/>
-                </a:solidFill>
-              </a:defRPr>
-            </a:pPr>
-            <a:r>
-              <a:t>Transparencia Radical: Visibilidad total de decisiones.</a:t>
-            </a:r>
-          </a:p>
-          <a:p>
-            <a:pPr>
-              <a:spcBef>
-                <a:spcPts val="1400"/>
-              </a:spcBef>
-              <a:defRPr sz="2200">
-                <a:solidFill>
-                  <a:srgbClr val="323232"/>
-                </a:solidFill>
-              </a:defRPr>
-            </a:pPr>
-            <a:r>
-              <a:t>• Gobernanza Multinivel: Decisiones descentralizadas.</a:t>
-            </a:r>
-          </a:p>
-          <a:p>
-            <a:pPr>
-              <a:spcBef>
-                <a:spcPts val="1400"/>
-              </a:spcBef>
-              <a:defRPr sz="2200">
-                <a:solidFill>
-                  <a:srgbClr val="323232"/>
-                </a:solidFill>
-              </a:defRPr>
-            </a:pPr>
-            <a:r>
-              <a:t>• Calidad desde el Origen: Shift-left en QA y Seguridad.</a:t>
-            </a:r>
-          </a:p>
-          <a:p>
-            <a:pPr>
-              <a:spcBef>
-                <a:spcPts val="1400"/>
-              </a:spcBef>
-              <a:defRPr sz="2200">
-                <a:solidFill>
-                  <a:srgbClr val="323232"/>
-                </a:solidFill>
-              </a:defRPr>
-            </a:pPr>
-            <a:r>
-              <a:t>• Adaptabilidad Estructurada: Marcos flexibles.</a:t>
-            </a:r>
-          </a:p>
-          <a:p>
-            <a:pPr>
-              <a:spcBef>
-                <a:spcPts val="1400"/>
-              </a:spcBef>
-              <a:defRPr sz="2200">
-                <a:solidFill>
-                  <a:srgbClr val="323232"/>
-                </a:solidFill>
-              </a:defRPr>
-            </a:pPr>
-            <a:r>
-              <a:t>• Mejora Continua Cuantificada.</a:t>
-            </a:r>
-          </a:p>
-        </p:txBody>
-      </p:sp>
-    </p:spTree>
-  </p:cSld>
-  <p:clrMapOvr>
-    <a:masterClrMapping/>
-  </p:clrMapOvr>
-</p:sld>
-</file>
-
-<file path=ppt/slides/slide5.xml><?xml version="1.0" encoding="utf-8"?>
-<p:sld xmlns:a="http://schemas.openxmlformats.org/drawingml/2006/main" xmlns:p="http://schemas.openxmlformats.org/presentationml/2006/main" xmlns:r="http://schemas.openxmlformats.org/officeDocument/2006/relationships">
-  <p:cSld>
-    <p:spTree>
-      <p:nvGrpSpPr>
-        <p:cNvPr id="1" name=""/>
-        <p:cNvGrpSpPr/>
-        <p:nvPr/>
-      </p:nvGrpSpPr>
-      <p:grpSpPr/>
-      <p:sp>
-        <p:nvSpPr>
-          <p:cNvPr id="2" name="Rectangle 1"/>
-          <p:cNvSpPr/>
-          <p:nvPr/>
-        </p:nvSpPr>
-        <p:spPr>
-          <a:xfrm>
-            <a:off x="0" y="0"/>
-            <a:ext cx="12191695" cy="1097280"/>
-          </a:xfrm>
-          <a:prstGeom prst="rect">
+          <a:prstGeom prst="roundRect">
             <a:avLst/>
           </a:prstGeom>
           <a:solidFill>
-            <a:srgbClr val="1E3A5F"/>
+            <a:srgbClr val="CAC5B2"/>
           </a:solidFill>
-          <a:ln>
+          <a:ln w="25400">
             <a:solidFill>
-              <a:srgbClr val="1E3A5F"/>
+              <a:srgbClr val="121212"/>
             </a:solidFill>
           </a:ln>
         </p:spPr>
@@ -4592,29 +4131,37 @@
           <a:lstStyle/>
           <a:p>
             <a:pPr algn="ctr"/>
-          </a:p>
-        </p:txBody>
-      </p:sp>
-      <p:sp>
-        <p:nvSpPr>
-          <p:cNvPr id="3" name="Rectangle 2"/>
+            <a:r>
+              <a:rPr sz="1400" b="1">
+                <a:solidFill>
+                  <a:srgbClr val="121212"/>
+                </a:solidFill>
+              </a:rPr>
+              <a:t>Gate 2</a:t>
+            </a:r>
+          </a:p>
+        </p:txBody>
+      </p:sp>
+      <p:sp>
+        <p:nvSpPr>
+          <p:cNvPr id="7" name="Rounded Rectangle 6"/>
           <p:cNvSpPr/>
           <p:nvPr/>
         </p:nvSpPr>
         <p:spPr>
           <a:xfrm>
-            <a:off x="0" y="1097280"/>
-            <a:ext cx="12191695" cy="91440"/>
+            <a:off x="7315200" y="4754880"/>
+            <a:ext cx="914400" cy="731520"/>
           </a:xfrm>
-          <a:prstGeom prst="rect">
+          <a:prstGeom prst="roundRect">
             <a:avLst/>
           </a:prstGeom>
           <a:solidFill>
-            <a:srgbClr val="3B82F6"/>
+            <a:srgbClr val="CAC5B2"/>
           </a:solidFill>
-          <a:ln>
+          <a:ln w="25400">
             <a:solidFill>
-              <a:srgbClr val="3B82F6"/>
+              <a:srgbClr val="121212"/>
             </a:solidFill>
           </a:ln>
         </p:spPr>
@@ -4637,1072 +4184,13 @@
           <a:lstStyle/>
           <a:p>
             <a:pPr algn="ctr"/>
-          </a:p>
-        </p:txBody>
-      </p:sp>
-      <p:sp>
-        <p:nvSpPr>
-          <p:cNvPr id="4" name="TextBox 3"/>
-          <p:cNvSpPr txBox="1"/>
-          <p:nvPr/>
-        </p:nvSpPr>
-        <p:spPr>
-          <a:xfrm>
-            <a:off x="457200" y="91440"/>
-            <a:ext cx="11277295" cy="914400"/>
-          </a:xfrm>
-          <a:prstGeom prst="rect">
-            <a:avLst/>
-          </a:prstGeom>
-          <a:noFill/>
-        </p:spPr>
-        <p:txBody>
-          <a:bodyPr wrap="none">
-            <a:spAutoFit/>
-          </a:bodyPr>
-          <a:lstStyle/>
-          <a:p>
-            <a:pPr>
-              <a:defRPr b="1" sz="3600">
+            <a:r>
+              <a:rPr sz="1400" b="1">
                 <a:solidFill>
-                  <a:srgbClr val="FFFFFF"/>
+                  <a:srgbClr val="121212"/>
                 </a:solidFill>
-              </a:defRPr>
-            </a:pPr>
-            <a:r>
-              <a:t>Anatomía del Gobierno SDLC</a:t>
-            </a:r>
-          </a:p>
-        </p:txBody>
-      </p:sp>
-      <p:sp>
-        <p:nvSpPr>
-          <p:cNvPr id="5" name="TextBox 4"/>
-          <p:cNvSpPr txBox="1"/>
-          <p:nvPr/>
-        </p:nvSpPr>
-        <p:spPr>
-          <a:xfrm>
-            <a:off x="457200" y="1645920"/>
-            <a:ext cx="11277295" cy="5029200"/>
-          </a:xfrm>
-          <a:prstGeom prst="rect">
-            <a:avLst/>
-          </a:prstGeom>
-          <a:noFill/>
-        </p:spPr>
-        <p:txBody>
-          <a:bodyPr wrap="square">
-            <a:spAutoFit/>
-          </a:bodyPr>
-          <a:lstStyle/>
-          <a:p>
-            <a:pPr>
-              <a:defRPr sz="2200">
-                <a:solidFill>
-                  <a:srgbClr val="323232"/>
-                </a:solidFill>
-              </a:defRPr>
-            </a:pPr>
-            <a:r>
-              <a:t>8 Fases Estructuradas.</a:t>
-            </a:r>
-          </a:p>
-          <a:p>
-            <a:pPr>
-              <a:spcBef>
-                <a:spcPts val="1400"/>
-              </a:spcBef>
-              <a:defRPr sz="2200">
-                <a:solidFill>
-                  <a:srgbClr val="323232"/>
-                </a:solidFill>
-              </a:defRPr>
-            </a:pPr>
-            <a:r>
-              <a:t>• Roles y RACI.</a:t>
-            </a:r>
-          </a:p>
-          <a:p>
-            <a:pPr>
-              <a:spcBef>
-                <a:spcPts val="1400"/>
-              </a:spcBef>
-              <a:defRPr sz="2200">
-                <a:solidFill>
-                  <a:srgbClr val="323232"/>
-                </a:solidFill>
-              </a:defRPr>
-            </a:pPr>
-            <a:r>
-              <a:t>• Artefactos Obligatorios.</a:t>
-            </a:r>
-          </a:p>
-          <a:p>
-            <a:pPr>
-              <a:spcBef>
-                <a:spcPts val="1400"/>
-              </a:spcBef>
-              <a:defRPr sz="2200">
-                <a:solidFill>
-                  <a:srgbClr val="323232"/>
-                </a:solidFill>
-              </a:defRPr>
-            </a:pPr>
-            <a:r>
-              <a:t>• Tablero de Gobernanza.</a:t>
-            </a:r>
-          </a:p>
-        </p:txBody>
-      </p:sp>
-    </p:spTree>
-  </p:cSld>
-  <p:clrMapOvr>
-    <a:masterClrMapping/>
-  </p:clrMapOvr>
-</p:sld>
-</file>
-
-<file path=ppt/slides/slide6.xml><?xml version="1.0" encoding="utf-8"?>
-<p:sld xmlns:a="http://schemas.openxmlformats.org/drawingml/2006/main" xmlns:p="http://schemas.openxmlformats.org/presentationml/2006/main" xmlns:r="http://schemas.openxmlformats.org/officeDocument/2006/relationships">
-  <p:cSld>
-    <p:spTree>
-      <p:nvGrpSpPr>
-        <p:cNvPr id="1" name=""/>
-        <p:cNvGrpSpPr/>
-        <p:nvPr/>
-      </p:nvGrpSpPr>
-      <p:grpSpPr/>
-      <p:sp>
-        <p:nvSpPr>
-          <p:cNvPr id="2" name="Rectangle 1"/>
-          <p:cNvSpPr/>
-          <p:nvPr/>
-        </p:nvSpPr>
-        <p:spPr>
-          <a:xfrm>
-            <a:off x="0" y="0"/>
-            <a:ext cx="12191695" cy="1097280"/>
-          </a:xfrm>
-          <a:prstGeom prst="rect">
-            <a:avLst/>
-          </a:prstGeom>
-          <a:solidFill>
-            <a:srgbClr val="1E3A5F"/>
-          </a:solidFill>
-          <a:ln>
-            <a:solidFill>
-              <a:srgbClr val="1E3A5F"/>
-            </a:solidFill>
-          </a:ln>
-        </p:spPr>
-        <p:style>
-          <a:lnRef idx="1">
-            <a:schemeClr val="accent1"/>
-          </a:lnRef>
-          <a:fillRef idx="3">
-            <a:schemeClr val="accent1"/>
-          </a:fillRef>
-          <a:effectRef idx="2">
-            <a:schemeClr val="accent1"/>
-          </a:effectRef>
-          <a:fontRef idx="minor">
-            <a:schemeClr val="lt1"/>
-          </a:fontRef>
-        </p:style>
-        <p:txBody>
-          <a:bodyPr rtlCol="0" anchor="ctr"/>
-          <a:lstStyle/>
-          <a:p>
-            <a:pPr algn="ctr"/>
-          </a:p>
-        </p:txBody>
-      </p:sp>
-      <p:sp>
-        <p:nvSpPr>
-          <p:cNvPr id="3" name="Rectangle 2"/>
-          <p:cNvSpPr/>
-          <p:nvPr/>
-        </p:nvSpPr>
-        <p:spPr>
-          <a:xfrm>
-            <a:off x="0" y="1097280"/>
-            <a:ext cx="12191695" cy="91440"/>
-          </a:xfrm>
-          <a:prstGeom prst="rect">
-            <a:avLst/>
-          </a:prstGeom>
-          <a:solidFill>
-            <a:srgbClr val="3B82F6"/>
-          </a:solidFill>
-          <a:ln>
-            <a:solidFill>
-              <a:srgbClr val="3B82F6"/>
-            </a:solidFill>
-          </a:ln>
-        </p:spPr>
-        <p:style>
-          <a:lnRef idx="1">
-            <a:schemeClr val="accent1"/>
-          </a:lnRef>
-          <a:fillRef idx="3">
-            <a:schemeClr val="accent1"/>
-          </a:fillRef>
-          <a:effectRef idx="2">
-            <a:schemeClr val="accent1"/>
-          </a:effectRef>
-          <a:fontRef idx="minor">
-            <a:schemeClr val="lt1"/>
-          </a:fontRef>
-        </p:style>
-        <p:txBody>
-          <a:bodyPr rtlCol="0" anchor="ctr"/>
-          <a:lstStyle/>
-          <a:p>
-            <a:pPr algn="ctr"/>
-          </a:p>
-        </p:txBody>
-      </p:sp>
-      <p:sp>
-        <p:nvSpPr>
-          <p:cNvPr id="4" name="TextBox 3"/>
-          <p:cNvSpPr txBox="1"/>
-          <p:nvPr/>
-        </p:nvSpPr>
-        <p:spPr>
-          <a:xfrm>
-            <a:off x="457200" y="91440"/>
-            <a:ext cx="11277295" cy="914400"/>
-          </a:xfrm>
-          <a:prstGeom prst="rect">
-            <a:avLst/>
-          </a:prstGeom>
-          <a:noFill/>
-        </p:spPr>
-        <p:txBody>
-          <a:bodyPr wrap="none">
-            <a:spAutoFit/>
-          </a:bodyPr>
-          <a:lstStyle/>
-          <a:p>
-            <a:pPr>
-              <a:defRPr b="1" sz="3600">
-                <a:solidFill>
-                  <a:srgbClr val="FFFFFF"/>
-                </a:solidFill>
-              </a:defRPr>
-            </a:pPr>
-            <a:r>
-              <a:t>Carriles y Puertas de Decisión (Go/No-Go)</a:t>
-            </a:r>
-          </a:p>
-        </p:txBody>
-      </p:sp>
-      <p:sp>
-        <p:nvSpPr>
-          <p:cNvPr id="5" name="TextBox 4"/>
-          <p:cNvSpPr txBox="1"/>
-          <p:nvPr/>
-        </p:nvSpPr>
-        <p:spPr>
-          <a:xfrm>
-            <a:off x="457200" y="1645920"/>
-            <a:ext cx="11277295" cy="5029200"/>
-          </a:xfrm>
-          <a:prstGeom prst="rect">
-            <a:avLst/>
-          </a:prstGeom>
-          <a:noFill/>
-        </p:spPr>
-        <p:txBody>
-          <a:bodyPr wrap="square">
-            <a:spAutoFit/>
-          </a:bodyPr>
-          <a:lstStyle/>
-          <a:p>
-            <a:pPr>
-              <a:defRPr sz="2200">
-                <a:solidFill>
-                  <a:srgbClr val="323232"/>
-                </a:solidFill>
-              </a:defRPr>
-            </a:pPr>
-            <a:r>
-              <a:t>Transición bloqueada hasta cumplir Criterios.</a:t>
-            </a:r>
-          </a:p>
-          <a:p>
-            <a:pPr>
-              <a:spcBef>
-                <a:spcPts val="1400"/>
-              </a:spcBef>
-              <a:defRPr sz="2200">
-                <a:solidFill>
-                  <a:srgbClr val="323232"/>
-                </a:solidFill>
-              </a:defRPr>
-            </a:pPr>
-            <a:r>
-              <a:t>• Gate 1: Aprobación Presupuestal.</a:t>
-            </a:r>
-          </a:p>
-          <a:p>
-            <a:pPr>
-              <a:spcBef>
-                <a:spcPts val="1400"/>
-              </a:spcBef>
-              <a:defRPr sz="2200">
-                <a:solidFill>
-                  <a:srgbClr val="323232"/>
-                </a:solidFill>
-              </a:defRPr>
-            </a:pPr>
-            <a:r>
-              <a:t>• Gate 2: Aprobación Arquitectura.</a:t>
-            </a:r>
-          </a:p>
-          <a:p>
-            <a:pPr>
-              <a:spcBef>
-                <a:spcPts val="1400"/>
-              </a:spcBef>
-              <a:defRPr sz="2200">
-                <a:solidFill>
-                  <a:srgbClr val="323232"/>
-                </a:solidFill>
-              </a:defRPr>
-            </a:pPr>
-            <a:r>
-              <a:t>• Gate 3: Certificación Calidad.</a:t>
-            </a:r>
-          </a:p>
-          <a:p>
-            <a:pPr>
-              <a:spcBef>
-                <a:spcPts val="1400"/>
-              </a:spcBef>
-              <a:defRPr sz="2200">
-                <a:solidFill>
-                  <a:srgbClr val="323232"/>
-                </a:solidFill>
-              </a:defRPr>
-            </a:pPr>
-            <a:r>
-              <a:t>• Gate 4: Aprobación CAB.</a:t>
-            </a:r>
-          </a:p>
-        </p:txBody>
-      </p:sp>
-    </p:spTree>
-  </p:cSld>
-  <p:clrMapOvr>
-    <a:masterClrMapping/>
-  </p:clrMapOvr>
-</p:sld>
-</file>
-
-<file path=ppt/slides/slide7.xml><?xml version="1.0" encoding="utf-8"?>
-<p:sld xmlns:a="http://schemas.openxmlformats.org/drawingml/2006/main" xmlns:p="http://schemas.openxmlformats.org/presentationml/2006/main" xmlns:r="http://schemas.openxmlformats.org/officeDocument/2006/relationships">
-  <p:cSld>
-    <p:spTree>
-      <p:nvGrpSpPr>
-        <p:cNvPr id="1" name=""/>
-        <p:cNvGrpSpPr/>
-        <p:nvPr/>
-      </p:nvGrpSpPr>
-      <p:grpSpPr/>
-      <p:sp>
-        <p:nvSpPr>
-          <p:cNvPr id="2" name="Rectangle 1"/>
-          <p:cNvSpPr/>
-          <p:nvPr/>
-        </p:nvSpPr>
-        <p:spPr>
-          <a:xfrm>
-            <a:off x="0" y="0"/>
-            <a:ext cx="12191695" cy="1097280"/>
-          </a:xfrm>
-          <a:prstGeom prst="rect">
-            <a:avLst/>
-          </a:prstGeom>
-          <a:solidFill>
-            <a:srgbClr val="1E3A5F"/>
-          </a:solidFill>
-          <a:ln>
-            <a:solidFill>
-              <a:srgbClr val="1E3A5F"/>
-            </a:solidFill>
-          </a:ln>
-        </p:spPr>
-        <p:style>
-          <a:lnRef idx="1">
-            <a:schemeClr val="accent1"/>
-          </a:lnRef>
-          <a:fillRef idx="3">
-            <a:schemeClr val="accent1"/>
-          </a:fillRef>
-          <a:effectRef idx="2">
-            <a:schemeClr val="accent1"/>
-          </a:effectRef>
-          <a:fontRef idx="minor">
-            <a:schemeClr val="lt1"/>
-          </a:fontRef>
-        </p:style>
-        <p:txBody>
-          <a:bodyPr rtlCol="0" anchor="ctr"/>
-          <a:lstStyle/>
-          <a:p>
-            <a:pPr algn="ctr"/>
-          </a:p>
-        </p:txBody>
-      </p:sp>
-      <p:sp>
-        <p:nvSpPr>
-          <p:cNvPr id="3" name="Rectangle 2"/>
-          <p:cNvSpPr/>
-          <p:nvPr/>
-        </p:nvSpPr>
-        <p:spPr>
-          <a:xfrm>
-            <a:off x="0" y="1097280"/>
-            <a:ext cx="12191695" cy="91440"/>
-          </a:xfrm>
-          <a:prstGeom prst="rect">
-            <a:avLst/>
-          </a:prstGeom>
-          <a:solidFill>
-            <a:srgbClr val="3B82F6"/>
-          </a:solidFill>
-          <a:ln>
-            <a:solidFill>
-              <a:srgbClr val="3B82F6"/>
-            </a:solidFill>
-          </a:ln>
-        </p:spPr>
-        <p:style>
-          <a:lnRef idx="1">
-            <a:schemeClr val="accent1"/>
-          </a:lnRef>
-          <a:fillRef idx="3">
-            <a:schemeClr val="accent1"/>
-          </a:fillRef>
-          <a:effectRef idx="2">
-            <a:schemeClr val="accent1"/>
-          </a:effectRef>
-          <a:fontRef idx="minor">
-            <a:schemeClr val="lt1"/>
-          </a:fontRef>
-        </p:style>
-        <p:txBody>
-          <a:bodyPr rtlCol="0" anchor="ctr"/>
-          <a:lstStyle/>
-          <a:p>
-            <a:pPr algn="ctr"/>
-          </a:p>
-        </p:txBody>
-      </p:sp>
-      <p:sp>
-        <p:nvSpPr>
-          <p:cNvPr id="4" name="TextBox 3"/>
-          <p:cNvSpPr txBox="1"/>
-          <p:nvPr/>
-        </p:nvSpPr>
-        <p:spPr>
-          <a:xfrm>
-            <a:off x="457200" y="91440"/>
-            <a:ext cx="11277295" cy="914400"/>
-          </a:xfrm>
-          <a:prstGeom prst="rect">
-            <a:avLst/>
-          </a:prstGeom>
-          <a:noFill/>
-        </p:spPr>
-        <p:txBody>
-          <a:bodyPr wrap="none">
-            <a:spAutoFit/>
-          </a:bodyPr>
-          <a:lstStyle/>
-          <a:p>
-            <a:pPr>
-              <a:defRPr b="1" sz="3600">
-                <a:solidFill>
-                  <a:srgbClr val="FFFFFF"/>
-                </a:solidFill>
-              </a:defRPr>
-            </a:pPr>
-            <a:r>
-              <a:t>Las 8 Fases del SDLC Evolith</a:t>
-            </a:r>
-          </a:p>
-        </p:txBody>
-      </p:sp>
-      <p:sp>
-        <p:nvSpPr>
-          <p:cNvPr id="5" name="TextBox 4"/>
-          <p:cNvSpPr txBox="1"/>
-          <p:nvPr/>
-        </p:nvSpPr>
-        <p:spPr>
-          <a:xfrm>
-            <a:off x="457200" y="1645920"/>
-            <a:ext cx="11277295" cy="5029200"/>
-          </a:xfrm>
-          <a:prstGeom prst="rect">
-            <a:avLst/>
-          </a:prstGeom>
-          <a:noFill/>
-        </p:spPr>
-        <p:txBody>
-          <a:bodyPr wrap="square">
-            <a:spAutoFit/>
-          </a:bodyPr>
-          <a:lstStyle/>
-          <a:p>
-            <a:pPr>
-              <a:defRPr sz="2200">
-                <a:solidFill>
-                  <a:srgbClr val="323232"/>
-                </a:solidFill>
-              </a:defRPr>
-            </a:pPr>
-            <a:r>
-              <a:t>F1. Ideación (Business Case)</a:t>
-            </a:r>
-          </a:p>
-          <a:p>
-            <a:pPr>
-              <a:spcBef>
-                <a:spcPts val="1400"/>
-              </a:spcBef>
-              <a:defRPr sz="2200">
-                <a:solidFill>
-                  <a:srgbClr val="323232"/>
-                </a:solidFill>
-              </a:defRPr>
-            </a:pPr>
-            <a:r>
-              <a:t>• F2. Análisis (Especificación Requerimientos)</a:t>
-            </a:r>
-          </a:p>
-          <a:p>
-            <a:pPr>
-              <a:spcBef>
-                <a:spcPts val="1400"/>
-              </a:spcBef>
-              <a:defRPr sz="2200">
-                <a:solidFill>
-                  <a:srgbClr val="323232"/>
-                </a:solidFill>
-              </a:defRPr>
-            </a:pPr>
-            <a:r>
-              <a:t>• F3. Diseño (Blueprint)</a:t>
-            </a:r>
-          </a:p>
-          <a:p>
-            <a:pPr>
-              <a:spcBef>
-                <a:spcPts val="1400"/>
-              </a:spcBef>
-              <a:defRPr sz="2200">
-                <a:solidFill>
-                  <a:srgbClr val="323232"/>
-                </a:solidFill>
-              </a:defRPr>
-            </a:pPr>
-            <a:r>
-              <a:t>• F4. Construcción (Código/Tests)</a:t>
-            </a:r>
-          </a:p>
-          <a:p>
-            <a:pPr>
-              <a:spcBef>
-                <a:spcPts val="1400"/>
-              </a:spcBef>
-              <a:defRPr sz="2200">
-                <a:solidFill>
-                  <a:srgbClr val="323232"/>
-                </a:solidFill>
-              </a:defRPr>
-            </a:pPr>
-            <a:r>
-              <a:t>• F5. Pruebas (Plan Maestro)</a:t>
-            </a:r>
-          </a:p>
-          <a:p>
-            <a:pPr>
-              <a:spcBef>
-                <a:spcPts val="1400"/>
-              </a:spcBef>
-              <a:defRPr sz="2200">
-                <a:solidFill>
-                  <a:srgbClr val="323232"/>
-                </a:solidFill>
-              </a:defRPr>
-            </a:pPr>
-            <a:r>
-              <a:t>• F6. Despliegue (Runbook)</a:t>
-            </a:r>
-          </a:p>
-          <a:p>
-            <a:pPr>
-              <a:spcBef>
-                <a:spcPts val="1400"/>
-              </a:spcBef>
-              <a:defRPr sz="2200">
-                <a:solidFill>
-                  <a:srgbClr val="323232"/>
-                </a:solidFill>
-              </a:defRPr>
-            </a:pPr>
-            <a:r>
-              <a:t>• F7. Operación (Dashboards)</a:t>
-            </a:r>
-          </a:p>
-          <a:p>
-            <a:pPr>
-              <a:spcBef>
-                <a:spcPts val="1400"/>
-              </a:spcBef>
-              <a:defRPr sz="2200">
-                <a:solidFill>
-                  <a:srgbClr val="323232"/>
-                </a:solidFill>
-              </a:defRPr>
-            </a:pPr>
-            <a:r>
-              <a:t>• F8. Retiro (Sunset)</a:t>
-            </a:r>
-          </a:p>
-        </p:txBody>
-      </p:sp>
-    </p:spTree>
-  </p:cSld>
-  <p:clrMapOvr>
-    <a:masterClrMapping/>
-  </p:clrMapOvr>
-</p:sld>
-</file>
-
-<file path=ppt/slides/slide8.xml><?xml version="1.0" encoding="utf-8"?>
-<p:sld xmlns:a="http://schemas.openxmlformats.org/drawingml/2006/main" xmlns:p="http://schemas.openxmlformats.org/presentationml/2006/main" xmlns:r="http://schemas.openxmlformats.org/officeDocument/2006/relationships">
-  <p:cSld>
-    <p:spTree>
-      <p:nvGrpSpPr>
-        <p:cNvPr id="1" name=""/>
-        <p:cNvGrpSpPr/>
-        <p:nvPr/>
-      </p:nvGrpSpPr>
-      <p:grpSpPr/>
-      <p:sp>
-        <p:nvSpPr>
-          <p:cNvPr id="2" name="Rectangle 1"/>
-          <p:cNvSpPr/>
-          <p:nvPr/>
-        </p:nvSpPr>
-        <p:spPr>
-          <a:xfrm>
-            <a:off x="0" y="0"/>
-            <a:ext cx="12191695" cy="1097280"/>
-          </a:xfrm>
-          <a:prstGeom prst="rect">
-            <a:avLst/>
-          </a:prstGeom>
-          <a:solidFill>
-            <a:srgbClr val="1E3A5F"/>
-          </a:solidFill>
-          <a:ln>
-            <a:solidFill>
-              <a:srgbClr val="1E3A5F"/>
-            </a:solidFill>
-          </a:ln>
-        </p:spPr>
-        <p:style>
-          <a:lnRef idx="1">
-            <a:schemeClr val="accent1"/>
-          </a:lnRef>
-          <a:fillRef idx="3">
-            <a:schemeClr val="accent1"/>
-          </a:fillRef>
-          <a:effectRef idx="2">
-            <a:schemeClr val="accent1"/>
-          </a:effectRef>
-          <a:fontRef idx="minor">
-            <a:schemeClr val="lt1"/>
-          </a:fontRef>
-        </p:style>
-        <p:txBody>
-          <a:bodyPr rtlCol="0" anchor="ctr"/>
-          <a:lstStyle/>
-          <a:p>
-            <a:pPr algn="ctr"/>
-          </a:p>
-        </p:txBody>
-      </p:sp>
-      <p:sp>
-        <p:nvSpPr>
-          <p:cNvPr id="3" name="Rectangle 2"/>
-          <p:cNvSpPr/>
-          <p:nvPr/>
-        </p:nvSpPr>
-        <p:spPr>
-          <a:xfrm>
-            <a:off x="0" y="1097280"/>
-            <a:ext cx="12191695" cy="91440"/>
-          </a:xfrm>
-          <a:prstGeom prst="rect">
-            <a:avLst/>
-          </a:prstGeom>
-          <a:solidFill>
-            <a:srgbClr val="3B82F6"/>
-          </a:solidFill>
-          <a:ln>
-            <a:solidFill>
-              <a:srgbClr val="3B82F6"/>
-            </a:solidFill>
-          </a:ln>
-        </p:spPr>
-        <p:style>
-          <a:lnRef idx="1">
-            <a:schemeClr val="accent1"/>
-          </a:lnRef>
-          <a:fillRef idx="3">
-            <a:schemeClr val="accent1"/>
-          </a:fillRef>
-          <a:effectRef idx="2">
-            <a:schemeClr val="accent1"/>
-          </a:effectRef>
-          <a:fontRef idx="minor">
-            <a:schemeClr val="lt1"/>
-          </a:fontRef>
-        </p:style>
-        <p:txBody>
-          <a:bodyPr rtlCol="0" anchor="ctr"/>
-          <a:lstStyle/>
-          <a:p>
-            <a:pPr algn="ctr"/>
-          </a:p>
-        </p:txBody>
-      </p:sp>
-      <p:sp>
-        <p:nvSpPr>
-          <p:cNvPr id="4" name="TextBox 3"/>
-          <p:cNvSpPr txBox="1"/>
-          <p:nvPr/>
-        </p:nvSpPr>
-        <p:spPr>
-          <a:xfrm>
-            <a:off x="457200" y="91440"/>
-            <a:ext cx="11277295" cy="914400"/>
-          </a:xfrm>
-          <a:prstGeom prst="rect">
-            <a:avLst/>
-          </a:prstGeom>
-          <a:noFill/>
-        </p:spPr>
-        <p:txBody>
-          <a:bodyPr wrap="none">
-            <a:spAutoFit/>
-          </a:bodyPr>
-          <a:lstStyle/>
-          <a:p>
-            <a:pPr>
-              <a:defRPr b="1" sz="3600">
-                <a:solidFill>
-                  <a:srgbClr val="FFFFFF"/>
-                </a:solidFill>
-              </a:defRPr>
-            </a:pPr>
-            <a:r>
-              <a:t>El Impacto Tangible de Evolith</a:t>
-            </a:r>
-          </a:p>
-        </p:txBody>
-      </p:sp>
-      <p:sp>
-        <p:nvSpPr>
-          <p:cNvPr id="5" name="TextBox 4"/>
-          <p:cNvSpPr txBox="1"/>
-          <p:nvPr/>
-        </p:nvSpPr>
-        <p:spPr>
-          <a:xfrm>
-            <a:off x="457200" y="1645920"/>
-            <a:ext cx="11277295" cy="5029200"/>
-          </a:xfrm>
-          <a:prstGeom prst="rect">
-            <a:avLst/>
-          </a:prstGeom>
-          <a:noFill/>
-        </p:spPr>
-        <p:txBody>
-          <a:bodyPr wrap="square">
-            <a:spAutoFit/>
-          </a:bodyPr>
-          <a:lstStyle/>
-          <a:p>
-            <a:pPr>
-              <a:defRPr sz="2200">
-                <a:solidFill>
-                  <a:srgbClr val="323232"/>
-                </a:solidFill>
-              </a:defRPr>
-            </a:pPr>
-            <a:r>
-              <a:t>Time-to-Market: -35%</a:t>
-            </a:r>
-          </a:p>
-          <a:p>
-            <a:pPr>
-              <a:spcBef>
-                <a:spcPts val="1400"/>
-              </a:spcBef>
-              <a:defRPr sz="2200">
-                <a:solidFill>
-                  <a:srgbClr val="323232"/>
-                </a:solidFill>
-              </a:defRPr>
-            </a:pPr>
-            <a:r>
-              <a:t>• Estabilidad: -50% defectos críticos.</a:t>
-            </a:r>
-          </a:p>
-          <a:p>
-            <a:pPr>
-              <a:spcBef>
-                <a:spcPts val="1400"/>
-              </a:spcBef>
-              <a:defRPr sz="2200">
-                <a:solidFill>
-                  <a:srgbClr val="323232"/>
-                </a:solidFill>
-              </a:defRPr>
-            </a:pPr>
-            <a:r>
-              <a:t>• Cumplimiento: 100% trazabilidad.</a:t>
-            </a:r>
-          </a:p>
-        </p:txBody>
-      </p:sp>
-    </p:spTree>
-  </p:cSld>
-  <p:clrMapOvr>
-    <a:masterClrMapping/>
-  </p:clrMapOvr>
-</p:sld>
-</file>
-
-<file path=ppt/slides/slide9.xml><?xml version="1.0" encoding="utf-8"?>
-<p:sld xmlns:a="http://schemas.openxmlformats.org/drawingml/2006/main" xmlns:p="http://schemas.openxmlformats.org/presentationml/2006/main" xmlns:r="http://schemas.openxmlformats.org/officeDocument/2006/relationships">
-  <p:cSld>
-    <p:spTree>
-      <p:nvGrpSpPr>
-        <p:cNvPr id="1" name=""/>
-        <p:cNvGrpSpPr/>
-        <p:nvPr/>
-      </p:nvGrpSpPr>
-      <p:grpSpPr/>
-      <p:sp>
-        <p:nvSpPr>
-          <p:cNvPr id="2" name="Rectangle 1"/>
-          <p:cNvSpPr/>
-          <p:nvPr/>
-        </p:nvSpPr>
-        <p:spPr>
-          <a:xfrm>
-            <a:off x="0" y="0"/>
-            <a:ext cx="12191695" cy="1097280"/>
-          </a:xfrm>
-          <a:prstGeom prst="rect">
-            <a:avLst/>
-          </a:prstGeom>
-          <a:solidFill>
-            <a:srgbClr val="1E3A5F"/>
-          </a:solidFill>
-          <a:ln>
-            <a:solidFill>
-              <a:srgbClr val="1E3A5F"/>
-            </a:solidFill>
-          </a:ln>
-        </p:spPr>
-        <p:style>
-          <a:lnRef idx="1">
-            <a:schemeClr val="accent1"/>
-          </a:lnRef>
-          <a:fillRef idx="3">
-            <a:schemeClr val="accent1"/>
-          </a:fillRef>
-          <a:effectRef idx="2">
-            <a:schemeClr val="accent1"/>
-          </a:effectRef>
-          <a:fontRef idx="minor">
-            <a:schemeClr val="lt1"/>
-          </a:fontRef>
-        </p:style>
-        <p:txBody>
-          <a:bodyPr rtlCol="0" anchor="ctr"/>
-          <a:lstStyle/>
-          <a:p>
-            <a:pPr algn="ctr"/>
-          </a:p>
-        </p:txBody>
-      </p:sp>
-      <p:sp>
-        <p:nvSpPr>
-          <p:cNvPr id="3" name="Rectangle 2"/>
-          <p:cNvSpPr/>
-          <p:nvPr/>
-        </p:nvSpPr>
-        <p:spPr>
-          <a:xfrm>
-            <a:off x="0" y="1097280"/>
-            <a:ext cx="12191695" cy="91440"/>
-          </a:xfrm>
-          <a:prstGeom prst="rect">
-            <a:avLst/>
-          </a:prstGeom>
-          <a:solidFill>
-            <a:srgbClr val="3B82F6"/>
-          </a:solidFill>
-          <a:ln>
-            <a:solidFill>
-              <a:srgbClr val="3B82F6"/>
-            </a:solidFill>
-          </a:ln>
-        </p:spPr>
-        <p:style>
-          <a:lnRef idx="1">
-            <a:schemeClr val="accent1"/>
-          </a:lnRef>
-          <a:fillRef idx="3">
-            <a:schemeClr val="accent1"/>
-          </a:fillRef>
-          <a:effectRef idx="2">
-            <a:schemeClr val="accent1"/>
-          </a:effectRef>
-          <a:fontRef idx="minor">
-            <a:schemeClr val="lt1"/>
-          </a:fontRef>
-        </p:style>
-        <p:txBody>
-          <a:bodyPr rtlCol="0" anchor="ctr"/>
-          <a:lstStyle/>
-          <a:p>
-            <a:pPr algn="ctr"/>
-          </a:p>
-        </p:txBody>
-      </p:sp>
-      <p:sp>
-        <p:nvSpPr>
-          <p:cNvPr id="4" name="TextBox 3"/>
-          <p:cNvSpPr txBox="1"/>
-          <p:nvPr/>
-        </p:nvSpPr>
-        <p:spPr>
-          <a:xfrm>
-            <a:off x="457200" y="91440"/>
-            <a:ext cx="11277295" cy="914400"/>
-          </a:xfrm>
-          <a:prstGeom prst="rect">
-            <a:avLst/>
-          </a:prstGeom>
-          <a:noFill/>
-        </p:spPr>
-        <p:txBody>
-          <a:bodyPr wrap="none">
-            <a:spAutoFit/>
-          </a:bodyPr>
-          <a:lstStyle/>
-          <a:p>
-            <a:pPr>
-              <a:defRPr b="1" sz="3600">
-                <a:solidFill>
-                  <a:srgbClr val="FFFFFF"/>
-                </a:solidFill>
-              </a:defRPr>
-            </a:pPr>
-            <a:r>
-              <a:t>Adaptabilidad a Cualquier Industria</a:t>
-            </a:r>
-          </a:p>
-        </p:txBody>
-      </p:sp>
-      <p:sp>
-        <p:nvSpPr>
-          <p:cNvPr id="5" name="TextBox 4"/>
-          <p:cNvSpPr txBox="1"/>
-          <p:nvPr/>
-        </p:nvSpPr>
-        <p:spPr>
-          <a:xfrm>
-            <a:off x="457200" y="1645920"/>
-            <a:ext cx="11277295" cy="5029200"/>
-          </a:xfrm>
-          <a:prstGeom prst="rect">
-            <a:avLst/>
-          </a:prstGeom>
-          <a:noFill/>
-        </p:spPr>
-        <p:txBody>
-          <a:bodyPr wrap="square">
-            <a:spAutoFit/>
-          </a:bodyPr>
-          <a:lstStyle/>
-          <a:p>
-            <a:pPr>
-              <a:defRPr sz="2200">
-                <a:solidFill>
-                  <a:srgbClr val="323232"/>
-                </a:solidFill>
-              </a:defRPr>
-            </a:pPr>
-            <a:r>
-              <a:t>Banca / FinTech</a:t>
-            </a:r>
-          </a:p>
-          <a:p>
-            <a:pPr>
-              <a:spcBef>
-                <a:spcPts val="1400"/>
-              </a:spcBef>
-              <a:defRPr sz="2200">
-                <a:solidFill>
-                  <a:srgbClr val="323232"/>
-                </a:solidFill>
-              </a:defRPr>
-            </a:pPr>
-            <a:r>
-              <a:t>• Salud</a:t>
-            </a:r>
-          </a:p>
-          <a:p>
-            <a:pPr>
-              <a:spcBef>
-                <a:spcPts val="1400"/>
-              </a:spcBef>
-              <a:defRPr sz="2200">
-                <a:solidFill>
-                  <a:srgbClr val="323232"/>
-                </a:solidFill>
-              </a:defRPr>
-            </a:pPr>
-            <a:r>
-              <a:t>• Retail / Ecommerce</a:t>
-            </a:r>
-          </a:p>
-          <a:p>
-            <a:pPr>
-              <a:spcBef>
-                <a:spcPts val="1400"/>
-              </a:spcBef>
-              <a:defRPr sz="2200">
-                <a:solidFill>
-                  <a:srgbClr val="323232"/>
-                </a:solidFill>
-              </a:defRPr>
-            </a:pPr>
-            <a:r>
-              <a:t>• Energía / Industrial</a:t>
+              </a:rPr>
+              <a:t>Gate 3</a:t>
             </a:r>
           </a:p>
         </p:txBody>
